--- a/Topic_E/Exam_Practice/TE-L12_Speaking_Workshop_Topic_E_Review_and_Bridge_to_Final_Revision.pptx
+++ b/Topic_E/Exam_Practice/TE-L12_Speaking_Workshop_Topic_E_Review_and_Bridge_to_Final_Revision.pptx
@@ -615,7 +615,11 @@
           <a:lstStyle/>
           <a:p>
             <a:r>
-              <a:rPr lang="en-US" dirty="0"/>
+              <a:rPr lang="ar-SA" dirty="0">
+                <a:latin typeface="Amiri" pitchFamily="2" charset="-78"/>
+                <a:ea typeface="Amiri" pitchFamily="2" charset="-78"/>
+                <a:cs typeface="Amiri" pitchFamily="2" charset="-78"/>
+              </a:rPr>
               <a:t>ROLE PLAY C (Develop) — a trip report.
 SET-UP IN THE BREAKOUT ROOM: A = examiner (reads the left column ONLY — the questions, in order), B = candidate (sees the task column; Core may use the help column), C = observer (ticks the feedback checklist). 1 minute preparation, about 3 minutes speaking, 1 minute feedback, then rotate.
 Task ! is the unexpected question: in the exam the candidate has not seen it — the examiner should read it without warning.
@@ -707,7 +711,11 @@
           <a:lstStyle/>
           <a:p>
             <a:r>
-              <a:rPr lang="en-US" dirty="0"/>
+              <a:rPr lang="ar-SA" dirty="0">
+                <a:latin typeface="Amiri" pitchFamily="2" charset="-78"/>
+                <a:ea typeface="Amiri" pitchFamily="2" charset="-78"/>
+                <a:cs typeface="Amiri" pitchFamily="2" charset="-78"/>
+              </a:rPr>
               <a:t>ROLE PLAY D (Stretch) — a radio interview.
 SET-UP IN THE BREAKOUT ROOM: A = examiner (reads the left column ONLY — the questions, in order), B = candidate (sees the task column; Core may use the help column), C = observer (ticks the feedback checklist). 1 minute preparation, about 3 minutes speaking, 1 minute feedback, then rotate.
 Task ! is the unexpected question: in the exam the candidate has not seen it — the examiner should read it without warning.
@@ -1243,7 +1251,11 @@
           <a:lstStyle/>
           <a:p>
             <a:r>
-              <a:rPr lang="en-US" dirty="0"/>
+              <a:rPr lang="ar-SA" dirty="0">
+                <a:latin typeface="Amiri" pitchFamily="2" charset="-78"/>
+                <a:ea typeface="Amiri" pitchFamily="2" charset="-78"/>
+                <a:cs typeface="Amiri" pitchFamily="2" charset="-78"/>
+              </a:rPr>
               <a:t>TOPIC CONVERSATION — Core. Examiner asks the questions in order and may add “لِمَاذَا؟ / هَلْ يُمْكِنُ أَنْ تَشْرَحَ أَكْثَرَ؟” to push for more. Candidate aims for one full sentence per question.
 </a:t>
             </a:r>
@@ -1332,7 +1344,11 @@
           <a:lstStyle/>
           <a:p>
             <a:r>
-              <a:rPr lang="en-US" dirty="0"/>
+              <a:rPr lang="ar-SA" dirty="0">
+                <a:latin typeface="Amiri" pitchFamily="2" charset="-78"/>
+                <a:ea typeface="Amiri" pitchFamily="2" charset="-78"/>
+                <a:cs typeface="Amiri" pitchFamily="2" charset="-78"/>
+              </a:rPr>
               <a:t>TOPIC CONVERSATION — Develop. Examiner asks the questions in order and may add “لِمَاذَا؟ / هَلْ يُمْكِنُ أَنْ تَشْرَحَ أَكْثَرَ؟” to push for more. Candidate aims for two or three sentences, mixing time frames.
 </a:t>
             </a:r>
@@ -1421,7 +1437,11 @@
           <a:lstStyle/>
           <a:p>
             <a:r>
-              <a:rPr lang="en-US" dirty="0"/>
+              <a:rPr lang="ar-SA" dirty="0">
+                <a:latin typeface="Amiri" pitchFamily="2" charset="-78"/>
+                <a:ea typeface="Amiri" pitchFamily="2" charset="-78"/>
+                <a:cs typeface="Amiri" pitchFamily="2" charset="-78"/>
+              </a:rPr>
               <a:t>TOPIC CONVERSATION — Stretch. Examiner asks the questions in order and may add “لِمَاذَا؟ / هَلْ يُمْكِنُ أَنْ تَشْرَحَ أَكْثَرَ؟” to push for more. Candidate aims for a developed answer: opinion, balance, concession and a conditional.
 </a:t>
             </a:r>
@@ -1510,7 +1530,11 @@
           <a:lstStyle/>
           <a:p>
             <a:r>
-              <a:rPr lang="en-US" dirty="0"/>
+              <a:rPr lang="ar-SA" dirty="0">
+                <a:latin typeface="Amiri" pitchFamily="2" charset="-78"/>
+                <a:ea typeface="Amiri" pitchFamily="2" charset="-78"/>
+                <a:cs typeface="Amiri" pitchFamily="2" charset="-78"/>
+              </a:rPr>
               <a:t>WELCOME (1 min) — while students join.
 • Greet each student by name as they arrive: السَّلَامُ عَلَيْكُمْ. Take the register (Pastoral Tracker: attendance 0/1).
 • 2-MINUTE CHECK-IN (SEND training): a private chat to any student who seemed unsettled last lesson — “Are you okay today? 👍 / 👎”.
@@ -2224,7 +2248,11 @@
           <a:lstStyle/>
           <a:p>
             <a:r>
-              <a:rPr lang="en-US" dirty="0"/>
+              <a:rPr lang="ar-SA" dirty="0">
+                <a:latin typeface="Amiri" pitchFamily="2" charset="-78"/>
+                <a:ea typeface="Amiri" pitchFamily="2" charset="-78"/>
+                <a:cs typeface="Amiri" pitchFamily="2" charset="-78"/>
+              </a:rPr>
               <a:t>TEACH (3 min). Role play = precise and complete; conversation = develop. Choral repetition of the repair phrases. To a girl: تُعِيدِي.</a:t>
             </a:r>
             <a:endParaRPr lang="en-US" dirty="0"/>
@@ -2576,7 +2604,11 @@
           <a:lstStyle/>
           <a:p>
             <a:r>
-              <a:rPr lang="en-US" dirty="0"/>
+              <a:rPr lang="ar-SA" dirty="0">
+                <a:latin typeface="Amiri" pitchFamily="2" charset="-78"/>
+                <a:ea typeface="Amiri" pitchFamily="2" charset="-78"/>
+                <a:cs typeface="Amiri" pitchFamily="2" charset="-78"/>
+              </a:rPr>
               <a:t>ROLE PLAY A (Core) — airport arrivals.
 SET-UP IN THE BREAKOUT ROOM: A = examiner (reads the left column ONLY — the questions, in order), B = candidate (sees the task column; Core may use the help column), C = observer (ticks the feedback checklist). 1 minute preparation, about 3 minutes speaking, 1 minute feedback, then rotate.
 Task ! is the unexpected question: in the exam the candidate has not seen it — the examiner should read it without warning.
@@ -2668,7 +2700,11 @@
           <a:lstStyle/>
           <a:p>
             <a:r>
-              <a:rPr lang="en-US" dirty="0"/>
+              <a:rPr lang="ar-SA" dirty="0">
+                <a:latin typeface="Amiri" pitchFamily="2" charset="-78"/>
+                <a:ea typeface="Amiri" pitchFamily="2" charset="-78"/>
+                <a:cs typeface="Amiri" pitchFamily="2" charset="-78"/>
+              </a:rPr>
               <a:t>ROLE PLAY B (Core+) — a friend’s invitation.
 SET-UP IN THE BREAKOUT ROOM: A = examiner (reads the left column ONLY — the questions, in order), B = candidate (sees the task column; Core may use the help column), C = observer (ticks the feedback checklist). 1 minute preparation, about 3 minutes speaking, 1 minute feedback, then rotate.
 Task ! is the unexpected question: in the exam the candidate has not seen it — the examiner should read it without warning.
@@ -3156,6 +3192,7 @@
                   <a:srgbClr val="D4AF37"/>
                 </a:solidFill>
                 <a:latin typeface="Amiri" pitchFamily="2" charset="-78"/>
+                <a:ea typeface="Amiri" pitchFamily="2" charset="-78"/>
                 <a:cs typeface="Amiri" pitchFamily="2" charset="-78"/>
               </a:rPr>
               <a:t>م</a:t>
@@ -3362,6 +3399,7 @@
                   <a:srgbClr val="D4AF37"/>
                 </a:solidFill>
                 <a:latin typeface="Amiri" pitchFamily="2" charset="-78"/>
+                <a:ea typeface="Amiri" pitchFamily="2" charset="-78"/>
                 <a:cs typeface="Amiri" pitchFamily="2" charset="-78"/>
               </a:rPr>
               <a:t>وَرْشَةُ التَّحَدُّثِ — امْتِحَانٌ تَجْرِيبِيٌّ</a:t>
@@ -3819,6 +3857,7 @@
                   <a:srgbClr val="D4AF37"/>
                 </a:solidFill>
                 <a:latin typeface="Amiri" pitchFamily="2" charset="-78"/>
+                <a:ea typeface="Amiri" pitchFamily="2" charset="-78"/>
                 <a:cs typeface="Amiri" pitchFamily="2" charset="-78"/>
               </a:rPr>
               <a:t>م</a:t>
@@ -4139,6 +4178,7 @@
                   <a:srgbClr val="8A6D1E"/>
                 </a:solidFill>
                 <a:latin typeface="Amiri" pitchFamily="2" charset="-78"/>
+                <a:ea typeface="Amiri" pitchFamily="2" charset="-78"/>
                 <a:cs typeface="Amiri" pitchFamily="2" charset="-78"/>
               </a:rPr>
               <a:t>رِحْلَةٌ مَدْرَسِيَّةٌ إِلَى الأَنْدَلُسِ</a:t>
@@ -4419,6 +4459,7 @@
                   <a:srgbClr val="1B3B6F"/>
                 </a:solidFill>
                 <a:latin typeface="Amiri" pitchFamily="2" charset="-78"/>
+                <a:ea typeface="Amiri" pitchFamily="2" charset="-78"/>
                 <a:cs typeface="Amiri" pitchFamily="2" charset="-78"/>
               </a:rPr>
               <a:t>زُرْنَا … الَّذِي بُنِيَ فِي …</a:t>
@@ -4495,6 +4536,7 @@
                   <a:srgbClr val="1B3B6F"/>
                 </a:solidFill>
                 <a:latin typeface="Amiri" pitchFamily="2" charset="-78"/>
+                <a:ea typeface="Amiri" pitchFamily="2" charset="-78"/>
                 <a:cs typeface="Amiri" pitchFamily="2" charset="-78"/>
               </a:rPr>
               <a:t>مَاذَا زُرْتُمْ فِي غَرْنَاطَةَ؟</a:t>
@@ -4598,6 +4640,7 @@
                   <a:srgbClr val="1B3B6F"/>
                 </a:solidFill>
                 <a:latin typeface="Amiri" pitchFamily="2" charset="-78"/>
+                <a:ea typeface="Amiri" pitchFamily="2" charset="-78"/>
                 <a:cs typeface="Amiri" pitchFamily="2" charset="-78"/>
               </a:rPr>
               <a:t>زُرْنَا … ، وَهُوَ … ؛ كَانَ … ثُمَّ بُنِيَتْ …</a:t>
@@ -4674,6 +4717,7 @@
                   <a:srgbClr val="1B3B6F"/>
                 </a:solidFill>
                 <a:latin typeface="Amiri" pitchFamily="2" charset="-78"/>
+                <a:ea typeface="Amiri" pitchFamily="2" charset="-78"/>
                 <a:cs typeface="Amiri" pitchFamily="2" charset="-78"/>
               </a:rPr>
               <a:t>وَفِي قُرْطُبَةَ؟</a:t>
@@ -4777,6 +4821,7 @@
                   <a:srgbClr val="1B3B6F"/>
                 </a:solidFill>
                 <a:latin typeface="Amiri" pitchFamily="2" charset="-78"/>
+                <a:ea typeface="Amiri" pitchFamily="2" charset="-78"/>
                 <a:cs typeface="Amiri" pitchFamily="2" charset="-78"/>
               </a:rPr>
               <a:t>فَاجَأَنِي أَنَّ … ، مِمَّا …</a:t>
@@ -4853,6 +4898,7 @@
                   <a:srgbClr val="1B3B6F"/>
                 </a:solidFill>
                 <a:latin typeface="Amiri" pitchFamily="2" charset="-78"/>
+                <a:ea typeface="Amiri" pitchFamily="2" charset="-78"/>
                 <a:cs typeface="Amiri" pitchFamily="2" charset="-78"/>
               </a:rPr>
               <a:t>مَا الَّذِي فَاجَأَكَ؟</a:t>
@@ -4959,6 +5005,7 @@
                   <a:srgbClr val="1B3B6F"/>
                 </a:solidFill>
                 <a:latin typeface="Amiri" pitchFamily="2" charset="-78"/>
+                <a:ea typeface="Amiri" pitchFamily="2" charset="-78"/>
                 <a:cs typeface="Amiri" pitchFamily="2" charset="-78"/>
               </a:rPr>
               <a:t>فِي إِسْبَانْيَا … غَالِبًا … أَمَّا فِي بَرِيطَانْيَا فَنَتَعَشَّى …</a:t>
@@ -5035,6 +5082,7 @@
                   <a:srgbClr val="1B3B6F"/>
                 </a:solidFill>
                 <a:latin typeface="Amiri" pitchFamily="2" charset="-78"/>
+                <a:ea typeface="Amiri" pitchFamily="2" charset="-78"/>
                 <a:cs typeface="Amiri" pitchFamily="2" charset="-78"/>
               </a:rPr>
               <a:t>كَيْفَ تُقَارِنُ إِسْبَانْيَا اليَوْمَ بِبَرِيطَانْيَا؟</a:t>
@@ -5138,6 +5186,7 @@
                   <a:srgbClr val="1B3B6F"/>
                 </a:solidFill>
                 <a:latin typeface="Amiri" pitchFamily="2" charset="-78"/>
+                <a:ea typeface="Amiri" pitchFamily="2" charset="-78"/>
                 <a:cs typeface="Amiri" pitchFamily="2" charset="-78"/>
               </a:rPr>
               <a:t>إِذَا حَصَلْتُ عَلَى … فَسَأَدْرُسُ …</a:t>
@@ -5214,6 +5263,7 @@
                   <a:srgbClr val="1B3B6F"/>
                 </a:solidFill>
                 <a:latin typeface="Amiri" pitchFamily="2" charset="-78"/>
+                <a:ea typeface="Amiri" pitchFamily="2" charset="-78"/>
                 <a:cs typeface="Amiri" pitchFamily="2" charset="-78"/>
               </a:rPr>
               <a:t>هَلْ سَتَعُودُ إِلَى هُنَاكَ؟</a:t>
@@ -5423,6 +5473,7 @@
                   <a:srgbClr val="D4AF37"/>
                 </a:solidFill>
                 <a:latin typeface="Amiri" pitchFamily="2" charset="-78"/>
+                <a:ea typeface="Amiri" pitchFamily="2" charset="-78"/>
                 <a:cs typeface="Amiri" pitchFamily="2" charset="-78"/>
               </a:rPr>
               <a:t>م</a:t>
@@ -5743,6 +5794,7 @@
                   <a:srgbClr val="8A6D1E"/>
                 </a:solidFill>
                 <a:latin typeface="Amiri" pitchFamily="2" charset="-78"/>
+                <a:ea typeface="Amiri" pitchFamily="2" charset="-78"/>
                 <a:cs typeface="Amiri" pitchFamily="2" charset="-78"/>
               </a:rPr>
               <a:t>هَلْ يَحْتَرِمُ الشَّبَابُ الثَّقَافَاتِ الأُخْرَى؟</a:t>
@@ -6023,6 +6075,7 @@
                   <a:srgbClr val="1B3B6F"/>
                 </a:solidFill>
                 <a:latin typeface="Amiri" pitchFamily="2" charset="-78"/>
+                <a:ea typeface="Amiri" pitchFamily="2" charset="-78"/>
                 <a:cs typeface="Amiri" pitchFamily="2" charset="-78"/>
               </a:rPr>
               <a:t>مِنْ نَاحِيَةٍ … وَمِنْ نَاحِيَةٍ أُخْرَى …</a:t>
@@ -6102,6 +6155,7 @@
                   <a:srgbClr val="1B3B6F"/>
                 </a:solidFill>
                 <a:latin typeface="Amiri" pitchFamily="2" charset="-78"/>
+                <a:ea typeface="Amiri" pitchFamily="2" charset="-78"/>
                 <a:cs typeface="Amiri" pitchFamily="2" charset="-78"/>
               </a:rPr>
               <a:t>هَلْ جِيلُكُمْ أَكْثَرُ احْتِرَامًا لِلثَّقَافَاتِ الأُخْرَى مِنْ جِيلِ آبَائِكُمْ؟</a:t>
@@ -6205,6 +6259,7 @@
                   <a:srgbClr val="1B3B6F"/>
                 </a:solidFill>
                 <a:latin typeface="Amiri" pitchFamily="2" charset="-78"/>
+                <a:ea typeface="Amiri" pitchFamily="2" charset="-78"/>
                 <a:cs typeface="Amiri" pitchFamily="2" charset="-78"/>
               </a:rPr>
               <a:t>عِنْدَمَا … كُنْتُ أَظُنُّ … ثُمَّ …</a:t>
@@ -6281,6 +6336,7 @@
                   <a:srgbClr val="1B3B6F"/>
                 </a:solidFill>
                 <a:latin typeface="Amiri" pitchFamily="2" charset="-78"/>
+                <a:ea typeface="Amiri" pitchFamily="2" charset="-78"/>
                 <a:cs typeface="Amiri" pitchFamily="2" charset="-78"/>
               </a:rPr>
               <a:t>أَعْطِنَا مِثَالًا.</a:t>
@@ -6387,6 +6443,7 @@
                   <a:srgbClr val="1B3B6F"/>
                 </a:solidFill>
                 <a:latin typeface="Amiri" pitchFamily="2" charset="-78"/>
+                <a:ea typeface="Amiri" pitchFamily="2" charset="-78"/>
                 <a:cs typeface="Amiri" pitchFamily="2" charset="-78"/>
               </a:rPr>
               <a:t>صَحِيحٌ أَنَّ … غَيْرَ أَنَّ الاحْتِرَامَ لَا يَعْنِي … بَلْ …</a:t>
@@ -6466,6 +6523,7 @@
                   <a:srgbClr val="1B3B6F"/>
                 </a:solidFill>
                 <a:latin typeface="Amiri" pitchFamily="2" charset="-78"/>
+                <a:ea typeface="Amiri" pitchFamily="2" charset="-78"/>
                 <a:cs typeface="Amiri" pitchFamily="2" charset="-78"/>
               </a:rPr>
               <a:t>لٰكِنَّ بَعْضَ النَّاسِ يَقُولُونَ إِنَّ الاحْتِرَامَ يَعْنِي أَنْ نَقْبَلَ كُلَّ شَيْءٍ.</a:t>
@@ -6569,6 +6627,7 @@
                   <a:srgbClr val="1B3B6F"/>
                 </a:solidFill>
                 <a:latin typeface="Amiri" pitchFamily="2" charset="-78"/>
+                <a:ea typeface="Amiri" pitchFamily="2" charset="-78"/>
                 <a:cs typeface="Amiri" pitchFamily="2" charset="-78"/>
               </a:rPr>
               <a:t>يَنْبَغِي أَنْ تُدَرَّسَ … وَأَنْ تُنَظَّمَ …</a:t>
@@ -6645,6 +6704,7 @@
                   <a:srgbClr val="1B3B6F"/>
                 </a:solidFill>
                 <a:latin typeface="Amiri" pitchFamily="2" charset="-78"/>
+                <a:ea typeface="Amiri" pitchFamily="2" charset="-78"/>
                 <a:cs typeface="Amiri" pitchFamily="2" charset="-78"/>
               </a:rPr>
               <a:t>مَاذَا يَنْبَغِي أَنْ تَفْعَلَ المَدَارِسُ؟</a:t>
@@ -6748,6 +6808,7 @@
                   <a:srgbClr val="1B3B6F"/>
                 </a:solidFill>
                 <a:latin typeface="Amiri" pitchFamily="2" charset="-78"/>
+                <a:ea typeface="Amiri" pitchFamily="2" charset="-78"/>
                 <a:cs typeface="Amiri" pitchFamily="2" charset="-78"/>
               </a:rPr>
               <a:t>لَوْ أَعْطَيْتُهُمْ نَصِيحَةً، لَقُلْتُ: "…"</a:t>
@@ -6824,6 +6885,7 @@
                   <a:srgbClr val="1B3B6F"/>
                 </a:solidFill>
                 <a:latin typeface="Amiri" pitchFamily="2" charset="-78"/>
+                <a:ea typeface="Amiri" pitchFamily="2" charset="-78"/>
                 <a:cs typeface="Amiri" pitchFamily="2" charset="-78"/>
               </a:rPr>
               <a:t>لَوْ أَعْطَيْتَ جِيلَكَ نَصِيحَةً وَاحِدَةً، فَمَا هِيَ؟</a:t>
@@ -7033,6 +7095,7 @@
                   <a:srgbClr val="D4AF37"/>
                 </a:solidFill>
                 <a:latin typeface="Amiri" pitchFamily="2" charset="-78"/>
+                <a:ea typeface="Amiri" pitchFamily="2" charset="-78"/>
                 <a:cs typeface="Amiri" pitchFamily="2" charset="-78"/>
               </a:rPr>
               <a:t>م</a:t>
@@ -7353,6 +7416,7 @@
                   <a:srgbClr val="8A6D1E"/>
                 </a:solidFill>
                 <a:latin typeface="Amiri" pitchFamily="2" charset="-78"/>
+                <a:ea typeface="Amiri" pitchFamily="2" charset="-78"/>
                 <a:cs typeface="Amiri" pitchFamily="2" charset="-78"/>
               </a:rPr>
               <a:t>وَرَقَةُ المُلَاحِظِ</a:t>
@@ -8823,6 +8887,7 @@
                   <a:srgbClr val="D4AF37"/>
                 </a:solidFill>
                 <a:latin typeface="Amiri" pitchFamily="2" charset="-78"/>
+                <a:ea typeface="Amiri" pitchFamily="2" charset="-78"/>
                 <a:cs typeface="Amiri" pitchFamily="2" charset="-78"/>
               </a:rPr>
               <a:t>م</a:t>
@@ -9143,6 +9208,7 @@
                   <a:srgbClr val="8A6D1E"/>
                 </a:solidFill>
                 <a:latin typeface="Amiri" pitchFamily="2" charset="-78"/>
+                <a:ea typeface="Amiri" pitchFamily="2" charset="-78"/>
                 <a:cs typeface="Amiri" pitchFamily="2" charset="-78"/>
               </a:rPr>
               <a:t>نَمُوذَجُ الإِجَابَةِ</a:t>
@@ -9385,6 +9451,7 @@
                   <a:srgbClr val="1B3B6F"/>
                 </a:solidFill>
                 <a:latin typeface="Amiri" pitchFamily="2" charset="-78"/>
+                <a:ea typeface="Amiri" pitchFamily="2" charset="-78"/>
                 <a:cs typeface="Amiri" pitchFamily="2" charset="-78"/>
               </a:rPr>
               <a:t>أَهْلًا وَسَهْلًا يَا لَمَى! أَنَا سُمَيَّةُ، وَأَنَا بَرِيطَانِيَّةٌ.</a:t>
@@ -9461,6 +9528,7 @@
                   <a:srgbClr val="1B3B6F"/>
                 </a:solidFill>
                 <a:latin typeface="Amiri" pitchFamily="2" charset="-78"/>
+                <a:ea typeface="Amiri" pitchFamily="2" charset="-78"/>
                 <a:cs typeface="Amiri" pitchFamily="2" charset="-78"/>
               </a:rPr>
               <a:t>مَرْحَبًا! أَنَا لَمَى مِنْ عَمَّانَ.</a:t>
@@ -9564,6 +9632,7 @@
                   <a:srgbClr val="1B3B6F"/>
                 </a:solidFill>
                 <a:latin typeface="Amiri" pitchFamily="2" charset="-78"/>
+                <a:ea typeface="Amiri" pitchFamily="2" charset="-78"/>
                 <a:cs typeface="Amiri" pitchFamily="2" charset="-78"/>
               </a:rPr>
               <a:t>أَتَكَلَّمُ الإِنْجْلِيزِيَّةَ وَالعَرَبِيَّةَ.</a:t>
@@ -9640,6 +9709,7 @@
                   <a:srgbClr val="1B3B6F"/>
                 </a:solidFill>
                 <a:latin typeface="Amiri" pitchFamily="2" charset="-78"/>
+                <a:ea typeface="Amiri" pitchFamily="2" charset="-78"/>
                 <a:cs typeface="Amiri" pitchFamily="2" charset="-78"/>
               </a:rPr>
               <a:t>كَمْ لُغَةً تَتَكَلَّمِينَ؟</a:t>
@@ -9743,6 +9813,7 @@
                   <a:srgbClr val="1B3B6F"/>
                 </a:solidFill>
                 <a:latin typeface="Amiri" pitchFamily="2" charset="-78"/>
+                <a:ea typeface="Amiri" pitchFamily="2" charset="-78"/>
                 <a:cs typeface="Amiri" pitchFamily="2" charset="-78"/>
               </a:rPr>
               <a:t>كَمْ سَاعَةً كَانَتِ الرِّحْلَةُ؟</a:t>
@@ -9819,6 +9890,7 @@
                   <a:srgbClr val="1B3B6F"/>
                 </a:solidFill>
                 <a:latin typeface="Amiri" pitchFamily="2" charset="-78"/>
+                <a:ea typeface="Amiri" pitchFamily="2" charset="-78"/>
                 <a:cs typeface="Amiri" pitchFamily="2" charset="-78"/>
               </a:rPr>
               <a:t>جَمِيلٌ! الرِّحْلَةُ كَانَتْ طَوِيلَةً.</a:t>
@@ -9922,6 +9994,7 @@
                   <a:srgbClr val="1B3B6F"/>
                 </a:solidFill>
                 <a:latin typeface="Amiri" pitchFamily="2" charset="-78"/>
+                <a:ea typeface="Amiri" pitchFamily="2" charset="-78"/>
                 <a:cs typeface="Amiri" pitchFamily="2" charset="-78"/>
               </a:rPr>
               <a:t>سَنَذْهَبُ إِلَى البَيْتِ، ثُمَّ نَتَعَشَّى مَعَ أُسْرَتِي.</a:t>
@@ -9998,6 +10071,7 @@
                   <a:srgbClr val="1B3B6F"/>
                 </a:solidFill>
                 <a:latin typeface="Amiri" pitchFamily="2" charset="-78"/>
+                <a:ea typeface="Amiri" pitchFamily="2" charset="-78"/>
                 <a:cs typeface="Amiri" pitchFamily="2" charset="-78"/>
               </a:rPr>
               <a:t>سِتُّ سَاعَاتٍ. مَاذَا سَنَفْعَلُ اليَوْمَ؟</a:t>
@@ -10101,6 +10175,7 @@
                   <a:srgbClr val="1B3B6F"/>
                 </a:solidFill>
                 <a:latin typeface="Amiri" pitchFamily="2" charset="-78"/>
+                <a:ea typeface="Amiri" pitchFamily="2" charset="-78"/>
                 <a:cs typeface="Amiri" pitchFamily="2" charset="-78"/>
               </a:rPr>
               <a:t>نَعَمْ، نَخْلَعُ الأَحْذِيَةَ عِنْدَ البَابِ.</a:t>
@@ -10177,6 +10252,7 @@
                   <a:srgbClr val="1B3B6F"/>
                 </a:solidFill>
                 <a:latin typeface="Amiri" pitchFamily="2" charset="-78"/>
+                <a:ea typeface="Amiri" pitchFamily="2" charset="-78"/>
                 <a:cs typeface="Amiri" pitchFamily="2" charset="-78"/>
               </a:rPr>
               <a:t>هَلْ أَخْلَعُ حِذَائِي فِي بَيْتِكُمْ؟</a:t>
@@ -10386,6 +10462,7 @@
                   <a:srgbClr val="D4AF37"/>
                 </a:solidFill>
                 <a:latin typeface="Amiri" pitchFamily="2" charset="-78"/>
+                <a:ea typeface="Amiri" pitchFamily="2" charset="-78"/>
                 <a:cs typeface="Amiri" pitchFamily="2" charset="-78"/>
               </a:rPr>
               <a:t>م</a:t>
@@ -10706,6 +10783,7 @@
                   <a:srgbClr val="8A6D1E"/>
                 </a:solidFill>
                 <a:latin typeface="Amiri" pitchFamily="2" charset="-78"/>
+                <a:ea typeface="Amiri" pitchFamily="2" charset="-78"/>
                 <a:cs typeface="Amiri" pitchFamily="2" charset="-78"/>
               </a:rPr>
               <a:t>نَمُوذَجُ الإِجَابَةِ</a:t>
@@ -10948,6 +11026,7 @@
                   <a:srgbClr val="1B3B6F"/>
                 </a:solidFill>
                 <a:latin typeface="Amiri" pitchFamily="2" charset="-78"/>
+                <a:ea typeface="Amiri" pitchFamily="2" charset="-78"/>
                 <a:cs typeface="Amiri" pitchFamily="2" charset="-78"/>
               </a:rPr>
               <a:t>شُكْرًا جَزِيلًا، بِكُلِّ سُرُورٍ!</a:t>
@@ -11024,6 +11103,7 @@
                   <a:srgbClr val="1B3B6F"/>
                 </a:solidFill>
                 <a:latin typeface="Amiri" pitchFamily="2" charset="-78"/>
+                <a:ea typeface="Amiri" pitchFamily="2" charset="-78"/>
                 <a:cs typeface="Amiri" pitchFamily="2" charset="-78"/>
               </a:rPr>
               <a:t>أَدْعُوكِ إِلَى احْتِفَالِ دِيوَالِي فِي بَيْتِنَا يَوْمَ السَّبْتِ!</a:t>
@@ -11127,6 +11207,7 @@
                   <a:srgbClr val="1B3B6F"/>
                 </a:solidFill>
                 <a:latin typeface="Amiri" pitchFamily="2" charset="-78"/>
+                <a:ea typeface="Amiri" pitchFamily="2" charset="-78"/>
                 <a:cs typeface="Amiri" pitchFamily="2" charset="-78"/>
               </a:rPr>
               <a:t>مَاذَا أُحْضِرُ مَعِي؟</a:t>
@@ -11203,6 +11284,7 @@
                   <a:srgbClr val="1B3B6F"/>
                 </a:solidFill>
                 <a:latin typeface="Amiri" pitchFamily="2" charset="-78"/>
+                <a:ea typeface="Amiri" pitchFamily="2" charset="-78"/>
                 <a:cs typeface="Amiri" pitchFamily="2" charset="-78"/>
               </a:rPr>
               <a:t>سَيَكُونُ هُنَاكَ طَعَامٌ وَأَضْوَاءٌ كَثِيرَةٌ.</a:t>
@@ -11306,6 +11388,7 @@
                   <a:srgbClr val="1B3B6F"/>
                 </a:solidFill>
                 <a:latin typeface="Amiri" pitchFamily="2" charset="-78"/>
+                <a:ea typeface="Amiri" pitchFamily="2" charset="-78"/>
                 <a:cs typeface="Amiri" pitchFamily="2" charset="-78"/>
               </a:rPr>
               <a:t>نَعَمْ، عِيدُ الفِطْرِ؛ وَفِيهِ نَزُورُ الأَقَارِبَ وَنَأْكُلُ الحَلَوِيَّاتِ مِثْلَكُمْ، بَيْنَمَا تُضِيئُونَ أَنْتُمُ المَصَابِيحَ.</a:t>
@@ -11382,6 +11465,7 @@
                   <a:srgbClr val="1B3B6F"/>
                 </a:solidFill>
                 <a:latin typeface="Amiri" pitchFamily="2" charset="-78"/>
+                <a:ea typeface="Amiri" pitchFamily="2" charset="-78"/>
                 <a:cs typeface="Amiri" pitchFamily="2" charset="-78"/>
               </a:rPr>
               <a:t>حَلَوِيَّاتٍ إِنْ أَرَدْتِ. هَلْ عِنْدَكُمْ عِيدٌ مِثْلُهُ؟</a:t>
@@ -11485,6 +11569,7 @@
                   <a:srgbClr val="1B3B6F"/>
                 </a:solidFill>
                 <a:latin typeface="Amiri" pitchFamily="2" charset="-78"/>
+                <a:ea typeface="Amiri" pitchFamily="2" charset="-78"/>
                 <a:cs typeface="Amiri" pitchFamily="2" charset="-78"/>
               </a:rPr>
               <a:t>كَيْفَ أُحَيِّي جَدَّتَكِ بِاحْتِرَامٍ؟ وَهَلْ يَجِبُ أَنْ أَخْلَعَ حِذَائِي؟</a:t>
@@ -11561,6 +11646,7 @@
                   <a:srgbClr val="1B3B6F"/>
                 </a:solidFill>
                 <a:latin typeface="Amiri" pitchFamily="2" charset="-78"/>
+                <a:ea typeface="Amiri" pitchFamily="2" charset="-78"/>
                 <a:cs typeface="Amiri" pitchFamily="2" charset="-78"/>
               </a:rPr>
               <a:t>رَائِعٌ! سَتَحْضُرُ جَدَّتِي أَيْضًا.</a:t>
@@ -11664,6 +11750,7 @@
                   <a:srgbClr val="1B3B6F"/>
                 </a:solidFill>
                 <a:latin typeface="Amiri" pitchFamily="2" charset="-78"/>
+                <a:ea typeface="Amiri" pitchFamily="2" charset="-78"/>
                 <a:cs typeface="Amiri" pitchFamily="2" charset="-78"/>
               </a:rPr>
               <a:t>لِأَنَّهَا تُعَلِّمُنِي أَشْيَاءَ جَدِيدَةً؛ مَثَلًا، تَعَلَّمْتُ أَنَّ الضَّوْءَ فِي دِيوَالِي رَمْزٌ لِلْأَمَلِ.</a:t>
@@ -11743,6 +11830,7 @@
                   <a:srgbClr val="1B3B6F"/>
                 </a:solidFill>
                 <a:latin typeface="Amiri" pitchFamily="2" charset="-78"/>
+                <a:ea typeface="Amiri" pitchFamily="2" charset="-78"/>
                 <a:cs typeface="Amiri" pitchFamily="2" charset="-78"/>
               </a:rPr>
               <a:t>تَقُولِينَ "نَمَسْتِي" وَتَضُمِّينَ يَدَيْكِ. لِمَاذَا تُحِبِّينَ أَعْيَادَ الآخَرِينَ؟</a:t>
@@ -11952,6 +12040,7 @@
                   <a:srgbClr val="D4AF37"/>
                 </a:solidFill>
                 <a:latin typeface="Amiri" pitchFamily="2" charset="-78"/>
+                <a:ea typeface="Amiri" pitchFamily="2" charset="-78"/>
                 <a:cs typeface="Amiri" pitchFamily="2" charset="-78"/>
               </a:rPr>
               <a:t>م</a:t>
@@ -12272,6 +12361,7 @@
                   <a:srgbClr val="8A6D1E"/>
                 </a:solidFill>
                 <a:latin typeface="Amiri" pitchFamily="2" charset="-78"/>
+                <a:ea typeface="Amiri" pitchFamily="2" charset="-78"/>
                 <a:cs typeface="Amiri" pitchFamily="2" charset="-78"/>
               </a:rPr>
               <a:t>نَمُوذَجُ الإِجَابَةِ</a:t>
@@ -12514,6 +12604,7 @@
                   <a:srgbClr val="1B3B6F"/>
                 </a:solidFill>
                 <a:latin typeface="Amiri" pitchFamily="2" charset="-78"/>
+                <a:ea typeface="Amiri" pitchFamily="2" charset="-78"/>
                 <a:cs typeface="Amiri" pitchFamily="2" charset="-78"/>
               </a:rPr>
               <a:t>زُرْنَا قَصْرَ الحَمْرَاءِ الَّذِي بُنِيَ فِي القَرْنِ الرَّابِعَ عَشَرَ، وَرَأَيْنَا الكِتَابَاتِ العَرَبِيَّةَ عَلَى جُدْرَانِهِ.</a:t>
@@ -12590,6 +12681,7 @@
                   <a:srgbClr val="1B3B6F"/>
                 </a:solidFill>
                 <a:latin typeface="Amiri" pitchFamily="2" charset="-78"/>
+                <a:ea typeface="Amiri" pitchFamily="2" charset="-78"/>
                 <a:cs typeface="Amiri" pitchFamily="2" charset="-78"/>
               </a:rPr>
               <a:t>مَاذَا زُرْتُمْ فِي غَرْنَاطَةَ؟</a:t>
@@ -12693,6 +12785,7 @@
                   <a:srgbClr val="1B3B6F"/>
                 </a:solidFill>
                 <a:latin typeface="Amiri" pitchFamily="2" charset="-78"/>
+                <a:ea typeface="Amiri" pitchFamily="2" charset="-78"/>
                 <a:cs typeface="Amiri" pitchFamily="2" charset="-78"/>
               </a:rPr>
               <a:t>زُرْنَا المَسْجِدَ الكَبِيرَ، وَهُوَ اليَوْمَ كَاتِدْرَائِيَّةٌ؛ كَانَ مَسْجِدًا لِقُرُونٍ، ثُمَّ بُنِيَتْ كَنِيسَةٌ فِي وَسَطِهِ، فَتَرَى فِيهِ تَارِيخَ دِينَيْنِ.</a:t>
@@ -12769,6 +12862,7 @@
                   <a:srgbClr val="1B3B6F"/>
                 </a:solidFill>
                 <a:latin typeface="Amiri" pitchFamily="2" charset="-78"/>
+                <a:ea typeface="Amiri" pitchFamily="2" charset="-78"/>
                 <a:cs typeface="Amiri" pitchFamily="2" charset="-78"/>
               </a:rPr>
               <a:t>وَفِي قُرْطُبَةَ؟</a:t>
@@ -12872,6 +12966,7 @@
                   <a:srgbClr val="1B3B6F"/>
                 </a:solidFill>
                 <a:latin typeface="Amiri" pitchFamily="2" charset="-78"/>
+                <a:ea typeface="Amiri" pitchFamily="2" charset="-78"/>
                 <a:cs typeface="Amiri" pitchFamily="2" charset="-78"/>
               </a:rPr>
               <a:t>فَاجَأَنِي أَنَّ العُلَمَاءَ المُسْلِمِينَ وَاليَهُودَ وَالمَسِيحِيِّينَ عَمِلُوا مَعًا فِي التَّرْجَمَةِ، مِمَّا جَعَلَ قُرْطُبَةَ أَكْبَرَ مَدِينَةٍ عِلْمِيَّةٍ فِي أُورُوبَّا.</a:t>
@@ -12948,6 +13043,7 @@
                   <a:srgbClr val="1B3B6F"/>
                 </a:solidFill>
                 <a:latin typeface="Amiri" pitchFamily="2" charset="-78"/>
+                <a:ea typeface="Amiri" pitchFamily="2" charset="-78"/>
                 <a:cs typeface="Amiri" pitchFamily="2" charset="-78"/>
               </a:rPr>
               <a:t>مَا الَّذِي فَاجَأَكَ؟</a:t>
@@ -13051,6 +13147,7 @@
                   <a:srgbClr val="1B3B6F"/>
                 </a:solidFill>
                 <a:latin typeface="Amiri" pitchFamily="2" charset="-78"/>
+                <a:ea typeface="Amiri" pitchFamily="2" charset="-78"/>
                 <a:cs typeface="Amiri" pitchFamily="2" charset="-78"/>
               </a:rPr>
               <a:t>فِي إِسْبَانْيَا يَتَعَشَّى النَّاسُ غَالِبًا فِي العَاشِرَةِ، أَمَّا فِي بَرِيطَانْيَا فَنَتَعَشَّى قَبْلَ ذٰلِكَ بِكَثِيرٍ؛ وَلِكُلٍّ مِنْهُمَا سَبَبُهُ.</a:t>
@@ -13127,6 +13224,7 @@
                   <a:srgbClr val="1B3B6F"/>
                 </a:solidFill>
                 <a:latin typeface="Amiri" pitchFamily="2" charset="-78"/>
+                <a:ea typeface="Amiri" pitchFamily="2" charset="-78"/>
                 <a:cs typeface="Amiri" pitchFamily="2" charset="-78"/>
               </a:rPr>
               <a:t>كَيْفَ تُقَارِنُ إِسْبَانْيَا اليَوْمَ بِبَرِيطَانْيَا؟</a:t>
@@ -13230,6 +13328,7 @@
                   <a:srgbClr val="1B3B6F"/>
                 </a:solidFill>
                 <a:latin typeface="Amiri" pitchFamily="2" charset="-78"/>
+                <a:ea typeface="Amiri" pitchFamily="2" charset="-78"/>
                 <a:cs typeface="Amiri" pitchFamily="2" charset="-78"/>
               </a:rPr>
               <a:t>إِذَا حَصَلْتُ عَلَى مِنْحَةٍ، فَسَأَدْرُسُ التَّارِيخَ الأَنْدَلُسِيَّ فِي جَامِعَةِ غَرْنَاطَةَ.</a:t>
@@ -13306,6 +13405,7 @@
                   <a:srgbClr val="1B3B6F"/>
                 </a:solidFill>
                 <a:latin typeface="Amiri" pitchFamily="2" charset="-78"/>
+                <a:ea typeface="Amiri" pitchFamily="2" charset="-78"/>
                 <a:cs typeface="Amiri" pitchFamily="2" charset="-78"/>
               </a:rPr>
               <a:t>هَلْ سَتَعُودُ إِلَى هُنَاكَ؟</a:t>
@@ -13515,6 +13615,7 @@
                   <a:srgbClr val="D4AF37"/>
                 </a:solidFill>
                 <a:latin typeface="Amiri" pitchFamily="2" charset="-78"/>
+                <a:ea typeface="Amiri" pitchFamily="2" charset="-78"/>
                 <a:cs typeface="Amiri" pitchFamily="2" charset="-78"/>
               </a:rPr>
               <a:t>م</a:t>
@@ -13835,6 +13936,7 @@
                   <a:srgbClr val="8A6D1E"/>
                 </a:solidFill>
                 <a:latin typeface="Amiri" pitchFamily="2" charset="-78"/>
+                <a:ea typeface="Amiri" pitchFamily="2" charset="-78"/>
                 <a:cs typeface="Amiri" pitchFamily="2" charset="-78"/>
               </a:rPr>
               <a:t>نَمُوذَجُ الإِجَابَةِ</a:t>
@@ -14080,6 +14182,7 @@
                   <a:srgbClr val="1B3B6F"/>
                 </a:solidFill>
                 <a:latin typeface="Amiri" pitchFamily="2" charset="-78"/>
+                <a:ea typeface="Amiri" pitchFamily="2" charset="-78"/>
                 <a:cs typeface="Amiri" pitchFamily="2" charset="-78"/>
               </a:rPr>
               <a:t>مِنْ نَاحِيَةٍ، نَدْرُسُ وَنَلْعَبُ مَعَ زُمَلَاءَ مِنْ عَشَرَاتِ البُلْدَانِ، مِمَّا يَجْعَلُنَا أَكْثَرَ انْفِتَاحًا، وَمِنْ نَاحِيَةٍ أُخْرَى، تَنْتَشِرُ الصُّوَرُ النَّمَطِيَّةُ عَلَى الإِنْتَرْنِتِ أَسْرَعَ مِنْ قَبْلُ.</a:t>
@@ -14159,6 +14262,7 @@
                   <a:srgbClr val="1B3B6F"/>
                 </a:solidFill>
                 <a:latin typeface="Amiri" pitchFamily="2" charset="-78"/>
+                <a:ea typeface="Amiri" pitchFamily="2" charset="-78"/>
                 <a:cs typeface="Amiri" pitchFamily="2" charset="-78"/>
               </a:rPr>
               <a:t>هَلْ جِيلُكُمْ أَكْثَرُ احْتِرَامًا لِلثَّقَافَاتِ الأُخْرَى مِنْ جِيلِ آبَائِكُمْ؟</a:t>
@@ -14262,6 +14366,7 @@
                   <a:srgbClr val="1B3B6F"/>
                 </a:solidFill>
                 <a:latin typeface="Amiri" pitchFamily="2" charset="-78"/>
+                <a:ea typeface="Amiri" pitchFamily="2" charset="-78"/>
                 <a:cs typeface="Amiri" pitchFamily="2" charset="-78"/>
               </a:rPr>
               <a:t>عِنْدَمَا وَصَلَتْ إِلَى صَفِّنَا طَالِبَةٌ مِنْ أَفْغَانِسْتَانَ، كَانَ بَعْضُ الزُّمَلَاءِ يَظُنُّونَ أَنَّهَا لَا تَتَكَلَّمُ، ثُمَّ اكْتَشَفْنَا أَنَّهَا تَتَكَلَّمُ أَرْبَعَ لُغَاتٍ!</a:t>
@@ -14338,6 +14443,7 @@
                   <a:srgbClr val="1B3B6F"/>
                 </a:solidFill>
                 <a:latin typeface="Amiri" pitchFamily="2" charset="-78"/>
+                <a:ea typeface="Amiri" pitchFamily="2" charset="-78"/>
                 <a:cs typeface="Amiri" pitchFamily="2" charset="-78"/>
               </a:rPr>
               <a:t>أَعْطِنَا مِثَالًا.</a:t>
@@ -14441,6 +14547,7 @@
                   <a:srgbClr val="1B3B6F"/>
                 </a:solidFill>
                 <a:latin typeface="Amiri" pitchFamily="2" charset="-78"/>
+                <a:ea typeface="Amiri" pitchFamily="2" charset="-78"/>
                 <a:cs typeface="Amiri" pitchFamily="2" charset="-78"/>
               </a:rPr>
               <a:t>صَحِيحٌ أَنَّ الاحْتِرَامَ يَحْتَاجُ إِلَى تَسَامُحٍ، غَيْرَ أَنَّهُ لَا يَعْنِي أَنْ نَتَّفِقَ فِي كُلِّ شَيْءٍ، بَلْ أَنْ نَخْتَلِفَ بِأَدَبٍ، وَأَنْ نَسْأَلَ قَبْلَ أَنْ نَحْكُمَ.</a:t>
@@ -14520,6 +14627,7 @@
                   <a:srgbClr val="1B3B6F"/>
                 </a:solidFill>
                 <a:latin typeface="Amiri" pitchFamily="2" charset="-78"/>
+                <a:ea typeface="Amiri" pitchFamily="2" charset="-78"/>
                 <a:cs typeface="Amiri" pitchFamily="2" charset="-78"/>
               </a:rPr>
               <a:t>لٰكِنَّ بَعْضَ النَّاسِ يَقُولُونَ إِنَّ الاحْتِرَامَ يَعْنِي أَنْ نَقْبَلَ كُلَّ شَيْءٍ.</a:t>
@@ -14626,6 +14734,7 @@
                   <a:srgbClr val="1B3B6F"/>
                 </a:solidFill>
                 <a:latin typeface="Amiri" pitchFamily="2" charset="-78"/>
+                <a:ea typeface="Amiri" pitchFamily="2" charset="-78"/>
                 <a:cs typeface="Amiri" pitchFamily="2" charset="-78"/>
               </a:rPr>
               <a:t>يَنْبَغِي أَنْ تُدَرَّسَ اللُّغَاتُ وَالأَدْيَانُ بِطَرِيقَةٍ مُحْتَرِمَةٍ، وَأَنْ تُنَظَّمَ زِيَارَاتٌ لِأَمَاكِنِ العِبَادَةِ وَبَرَامِجُ لِلتَّبَادُلِ، لِأَنَّ المَعْرِفَةَ تَقْتُلُ الخَوْفَ.</a:t>
@@ -14702,6 +14811,7 @@
                   <a:srgbClr val="1B3B6F"/>
                 </a:solidFill>
                 <a:latin typeface="Amiri" pitchFamily="2" charset="-78"/>
+                <a:ea typeface="Amiri" pitchFamily="2" charset="-78"/>
                 <a:cs typeface="Amiri" pitchFamily="2" charset="-78"/>
               </a:rPr>
               <a:t>مَاذَا يَنْبَغِي أَنْ تَفْعَلَ المَدَارِسُ؟</a:t>
@@ -14805,6 +14915,7 @@
                   <a:srgbClr val="1B3B6F"/>
                 </a:solidFill>
                 <a:latin typeface="Amiri" pitchFamily="2" charset="-78"/>
+                <a:ea typeface="Amiri" pitchFamily="2" charset="-78"/>
                 <a:cs typeface="Amiri" pitchFamily="2" charset="-78"/>
               </a:rPr>
               <a:t>لَوْ أَعْطَيْتُهُمْ نَصِيحَةً وَاحِدَةً، لَقُلْتُ: "تَعَلَّمُوا لُغَةَ جَارِكُمْ، وَكُلُوا عَلَى مَائِدَتِهِ مَرَّةً؛ فَلَنْ تَرَوْهُ غَرِيبًا بَعْدَ ذٰلِكَ".</a:t>
@@ -14881,6 +14992,7 @@
                   <a:srgbClr val="1B3B6F"/>
                 </a:solidFill>
                 <a:latin typeface="Amiri" pitchFamily="2" charset="-78"/>
+                <a:ea typeface="Amiri" pitchFamily="2" charset="-78"/>
                 <a:cs typeface="Amiri" pitchFamily="2" charset="-78"/>
               </a:rPr>
               <a:t>لَوْ أَعْطَيْتَ جِيلَكَ نَصِيحَةً وَاحِدَةً، فَمَا هِيَ؟</a:t>
@@ -15090,6 +15202,7 @@
                   <a:srgbClr val="D4AF37"/>
                 </a:solidFill>
                 <a:latin typeface="Amiri" pitchFamily="2" charset="-78"/>
+                <a:ea typeface="Amiri" pitchFamily="2" charset="-78"/>
                 <a:cs typeface="Amiri" pitchFamily="2" charset="-78"/>
               </a:rPr>
               <a:t>م</a:t>
@@ -15410,6 +15523,7 @@
                   <a:srgbClr val="8A6D1E"/>
                 </a:solidFill>
                 <a:latin typeface="Amiri" pitchFamily="2" charset="-78"/>
+                <a:ea typeface="Amiri" pitchFamily="2" charset="-78"/>
                 <a:cs typeface="Amiri" pitchFamily="2" charset="-78"/>
               </a:rPr>
               <a:t>العَالَمُ الدُّوَلِيُّ</a:t>
@@ -15690,6 +15804,7 @@
                   <a:srgbClr val="1B3B6F"/>
                 </a:solidFill>
                 <a:latin typeface="Amiri" pitchFamily="2" charset="-78"/>
+                <a:ea typeface="Amiri" pitchFamily="2" charset="-78"/>
                 <a:cs typeface="Amiri" pitchFamily="2" charset="-78"/>
               </a:rPr>
               <a:t>أَنَا … وَأُسْرَتِي مِنْ …</a:t>
@@ -15766,6 +15881,7 @@
                   <a:srgbClr val="1B3B6F"/>
                 </a:solidFill>
                 <a:latin typeface="Amiri" pitchFamily="2" charset="-78"/>
+                <a:ea typeface="Amiri" pitchFamily="2" charset="-78"/>
                 <a:cs typeface="Amiri" pitchFamily="2" charset="-78"/>
               </a:rPr>
               <a:t>مَا جِنْسِيَّتُكَ؟ وَمِنْ أَيْنَ أُسْرَتُكَ؟</a:t>
@@ -15934,6 +16050,7 @@
                   <a:srgbClr val="1B3B6F"/>
                 </a:solidFill>
                 <a:latin typeface="Amiri" pitchFamily="2" charset="-78"/>
+                <a:ea typeface="Amiri" pitchFamily="2" charset="-78"/>
                 <a:cs typeface="Amiri" pitchFamily="2" charset="-78"/>
               </a:rPr>
               <a:t>أَتَكَلَّمُهَا مَعَ …</a:t>
@@ -16010,6 +16127,7 @@
                   <a:srgbClr val="1B3B6F"/>
                 </a:solidFill>
                 <a:latin typeface="Amiri" pitchFamily="2" charset="-78"/>
+                <a:ea typeface="Amiri" pitchFamily="2" charset="-78"/>
                 <a:cs typeface="Amiri" pitchFamily="2" charset="-78"/>
               </a:rPr>
               <a:t>مَعَ مَنْ تَتَكَلَّمُ العَرَبِيَّةَ؟</a:t>
@@ -16178,6 +16296,7 @@
                   <a:srgbClr val="1B3B6F"/>
                 </a:solidFill>
                 <a:latin typeface="Amiri" pitchFamily="2" charset="-78"/>
+                <a:ea typeface="Amiri" pitchFamily="2" charset="-78"/>
                 <a:cs typeface="Amiri" pitchFamily="2" charset="-78"/>
               </a:rPr>
               <a:t>نُقَدِّمُ …</a:t>
@@ -16254,6 +16373,7 @@
                   <a:srgbClr val="1B3B6F"/>
                 </a:solidFill>
                 <a:latin typeface="Amiri" pitchFamily="2" charset="-78"/>
+                <a:ea typeface="Amiri" pitchFamily="2" charset="-78"/>
                 <a:cs typeface="Amiri" pitchFamily="2" charset="-78"/>
               </a:rPr>
               <a:t>مَاذَا تُقَدِّمُونَ لِلضُّيُوفِ؟</a:t>
@@ -16422,6 +16542,7 @@
                   <a:srgbClr val="1B3B6F"/>
                 </a:solidFill>
                 <a:latin typeface="Amiri" pitchFamily="2" charset="-78"/>
+                <a:ea typeface="Amiri" pitchFamily="2" charset="-78"/>
                 <a:cs typeface="Amiri" pitchFamily="2" charset="-78"/>
               </a:rPr>
               <a:t>أَوَّلًا … ثُمَّ …</a:t>
@@ -16498,6 +16619,7 @@
                   <a:srgbClr val="1B3B6F"/>
                 </a:solidFill>
                 <a:latin typeface="Amiri" pitchFamily="2" charset="-78"/>
+                <a:ea typeface="Amiri" pitchFamily="2" charset="-78"/>
                 <a:cs typeface="Amiri" pitchFamily="2" charset="-78"/>
               </a:rPr>
               <a:t>كَيْفَ تَحْتَفِلُونَ بِالعِيدِ؟</a:t>
@@ -16666,6 +16788,7 @@
                   <a:srgbClr val="1B3B6F"/>
                 </a:solidFill>
                 <a:latin typeface="Amiri" pitchFamily="2" charset="-78"/>
+                <a:ea typeface="Amiri" pitchFamily="2" charset="-78"/>
                 <a:cs typeface="Amiri" pitchFamily="2" charset="-78"/>
               </a:rPr>
               <a:t>أُرِيدُ أَنْ أَزُورَ … لِأَنَّ …</a:t>
@@ -16742,6 +16865,7 @@
                   <a:srgbClr val="1B3B6F"/>
                 </a:solidFill>
                 <a:latin typeface="Amiri" pitchFamily="2" charset="-78"/>
+                <a:ea typeface="Amiri" pitchFamily="2" charset="-78"/>
                 <a:cs typeface="Amiri" pitchFamily="2" charset="-78"/>
               </a:rPr>
               <a:t>أَيُّ بَلَدٍ تُرِيدُ أَنْ تَزُورَ؟</a:t>
@@ -16896,6 +17020,7 @@
                   <a:srgbClr val="1B3B6F"/>
                 </a:solidFill>
                 <a:latin typeface="Amiri" pitchFamily="2" charset="-78"/>
+                <a:ea typeface="Amiri" pitchFamily="2" charset="-78"/>
                 <a:cs typeface="Amiri" pitchFamily="2" charset="-78"/>
               </a:rPr>
               <a:t>عَفْوًا، هَلْ يُمْكِنُ أَنْ تُعِيدَ السُّؤَالَ؟</a:t>
@@ -17029,6 +17154,7 @@
                   <a:srgbClr val="D4AF37"/>
                 </a:solidFill>
                 <a:latin typeface="Amiri" pitchFamily="2" charset="-78"/>
+                <a:ea typeface="Amiri" pitchFamily="2" charset="-78"/>
                 <a:cs typeface="Amiri" pitchFamily="2" charset="-78"/>
               </a:rPr>
               <a:t>م</a:t>
@@ -17349,6 +17475,7 @@
                   <a:srgbClr val="8A6D1E"/>
                 </a:solidFill>
                 <a:latin typeface="Amiri" pitchFamily="2" charset="-78"/>
+                <a:ea typeface="Amiri" pitchFamily="2" charset="-78"/>
                 <a:cs typeface="Amiri" pitchFamily="2" charset="-78"/>
               </a:rPr>
               <a:t>ثَقَافَاتٌ وَلُغَاتٌ وَرِحْلَاتٌ</a:t>
@@ -17629,6 +17756,7 @@
                   <a:srgbClr val="1B3B6F"/>
                 </a:solidFill>
                 <a:latin typeface="Amiri" pitchFamily="2" charset="-78"/>
+                <a:ea typeface="Amiri" pitchFamily="2" charset="-78"/>
                 <a:cs typeface="Amiri" pitchFamily="2" charset="-78"/>
               </a:rPr>
               <a:t>فِي البَيْتِ … بَيْنَمَا فِي المَدْرَسَةِ …</a:t>
@@ -17705,6 +17833,7 @@
                   <a:srgbClr val="1B3B6F"/>
                 </a:solidFill>
                 <a:latin typeface="Amiri" pitchFamily="2" charset="-78"/>
+                <a:ea typeface="Amiri" pitchFamily="2" charset="-78"/>
                 <a:cs typeface="Amiri" pitchFamily="2" charset="-78"/>
               </a:rPr>
               <a:t>كَيْفَ تَخْتَلِفُ حَيَاتُكَ فِي البَيْتِ عَنْ حَيَاتِكَ فِي المَدْرَسَةِ؟</a:t>
@@ -17808,6 +17937,7 @@
                   <a:srgbClr val="1B3B6F"/>
                 </a:solidFill>
                 <a:latin typeface="Amiri" pitchFamily="2" charset="-78"/>
+                <a:ea typeface="Amiri" pitchFamily="2" charset="-78"/>
                 <a:cs typeface="Amiri" pitchFamily="2" charset="-78"/>
               </a:rPr>
               <a:t>حَضَرْتُ … ؛ رَأَيْتُ … وَتَعَلَّمْتُ …</a:t>
@@ -17884,6 +18014,7 @@
                   <a:srgbClr val="1B3B6F"/>
                 </a:solidFill>
                 <a:latin typeface="Amiri" pitchFamily="2" charset="-78"/>
+                <a:ea typeface="Amiri" pitchFamily="2" charset="-78"/>
                 <a:cs typeface="Amiri" pitchFamily="2" charset="-78"/>
               </a:rPr>
               <a:t>صِفْ احْتِفَالًا حَضَرْتَهُ فِي ثَقَافَةٍ أُخْرَى.</a:t>
@@ -17987,6 +18118,7 @@
                   <a:srgbClr val="1B3B6F"/>
                 </a:solidFill>
                 <a:latin typeface="Amiri" pitchFamily="2" charset="-78"/>
+                <a:ea typeface="Amiri" pitchFamily="2" charset="-78"/>
                 <a:cs typeface="Amiri" pitchFamily="2" charset="-78"/>
               </a:rPr>
               <a:t>سَافَرْتُ إِلَى … ؛ وَبِسَبَبِ … فَاكْتَشَفْتُ …</a:t>
@@ -18063,6 +18195,7 @@
                   <a:srgbClr val="1B3B6F"/>
                 </a:solidFill>
                 <a:latin typeface="Amiri" pitchFamily="2" charset="-78"/>
+                <a:ea typeface="Amiri" pitchFamily="2" charset="-78"/>
                 <a:cs typeface="Amiri" pitchFamily="2" charset="-78"/>
               </a:rPr>
               <a:t>حَدِّثْنِي عَنْ رِحْلَةٍ إِلَى الخَارِجِ.</a:t>
@@ -18166,6 +18299,7 @@
                   <a:srgbClr val="1B3B6F"/>
                 </a:solidFill>
                 <a:latin typeface="Amiri" pitchFamily="2" charset="-78"/>
+                <a:ea typeface="Amiri" pitchFamily="2" charset="-78"/>
                 <a:cs typeface="Amiri" pitchFamily="2" charset="-78"/>
               </a:rPr>
               <a:t>كُنْتُ … أَمَّا الآنَ فَأَرَاهَا …</a:t>
@@ -18242,6 +18376,7 @@
                   <a:srgbClr val="1B3B6F"/>
                 </a:solidFill>
                 <a:latin typeface="Amiri" pitchFamily="2" charset="-78"/>
+                <a:ea typeface="Amiri" pitchFamily="2" charset="-78"/>
                 <a:cs typeface="Amiri" pitchFamily="2" charset="-78"/>
               </a:rPr>
               <a:t>هَلْ تَغَيَّرَتْ نَظْرَتُكَ إِلَى ثَقَافَتِكَ؟</a:t>
@@ -18345,6 +18480,7 @@
                   <a:srgbClr val="1B3B6F"/>
                 </a:solidFill>
                 <a:latin typeface="Amiri" pitchFamily="2" charset="-78"/>
+                <a:ea typeface="Amiri" pitchFamily="2" charset="-78"/>
                 <a:cs typeface="Amiri" pitchFamily="2" charset="-78"/>
               </a:rPr>
               <a:t>إِذَا دَرَسْتُ … فَسَأَسْتَخْدِمُ …</a:t>
@@ -18421,6 +18557,7 @@
                   <a:srgbClr val="1B3B6F"/>
                 </a:solidFill>
                 <a:latin typeface="Amiri" pitchFamily="2" charset="-78"/>
+                <a:ea typeface="Amiri" pitchFamily="2" charset="-78"/>
                 <a:cs typeface="Amiri" pitchFamily="2" charset="-78"/>
               </a:rPr>
               <a:t>كَيْفَ سَتَسْتَخْدِمُ لُغَاتِكَ فِي المُسْتَقْبَلِ؟</a:t>
@@ -18630,6 +18767,7 @@
                   <a:srgbClr val="D4AF37"/>
                 </a:solidFill>
                 <a:latin typeface="Amiri" pitchFamily="2" charset="-78"/>
+                <a:ea typeface="Amiri" pitchFamily="2" charset="-78"/>
                 <a:cs typeface="Amiri" pitchFamily="2" charset="-78"/>
               </a:rPr>
               <a:t>م</a:t>
@@ -18950,6 +19088,7 @@
                   <a:srgbClr val="8A6D1E"/>
                 </a:solidFill>
                 <a:latin typeface="Amiri" pitchFamily="2" charset="-78"/>
+                <a:ea typeface="Amiri" pitchFamily="2" charset="-78"/>
                 <a:cs typeface="Amiri" pitchFamily="2" charset="-78"/>
               </a:rPr>
               <a:t>الإِنْسَانُ بَيْنَ ثَقَافَتِهِ وَالعَالَمِ</a:t>
@@ -19230,6 +19369,7 @@
                   <a:srgbClr val="1B3B6F"/>
                 </a:solidFill>
                 <a:latin typeface="Amiri" pitchFamily="2" charset="-78"/>
+                <a:ea typeface="Amiri" pitchFamily="2" charset="-78"/>
                 <a:cs typeface="Amiri" pitchFamily="2" charset="-78"/>
               </a:rPr>
               <a:t>صَحِيحٌ أَنَّ … غَيْرَ أَنَّ …</a:t>
@@ -19306,6 +19446,7 @@
                   <a:srgbClr val="1B3B6F"/>
                 </a:solidFill>
                 <a:latin typeface="Amiri" pitchFamily="2" charset="-78"/>
+                <a:ea typeface="Amiri" pitchFamily="2" charset="-78"/>
                 <a:cs typeface="Amiri" pitchFamily="2" charset="-78"/>
               </a:rPr>
               <a:t>هَلْ يَجِبُ أَنْ تُدَرَّسَ الأَدْيَانُ وَالثَّقَافَاتُ فِي كُلِّ المَدَارِسِ؟</a:t>
@@ -19409,6 +19550,7 @@
                   <a:srgbClr val="1B3B6F"/>
                 </a:solidFill>
                 <a:latin typeface="Amiri" pitchFamily="2" charset="-78"/>
+                <a:ea typeface="Amiri" pitchFamily="2" charset="-78"/>
                 <a:cs typeface="Amiri" pitchFamily="2" charset="-78"/>
               </a:rPr>
               <a:t>مِنْ نَاحِيَةٍ … وَمِنْ نَاحِيَةٍ أُخْرَى …</a:t>
@@ -19485,6 +19627,7 @@
                   <a:srgbClr val="1B3B6F"/>
                 </a:solidFill>
                 <a:latin typeface="Amiri" pitchFamily="2" charset="-78"/>
+                <a:ea typeface="Amiri" pitchFamily="2" charset="-78"/>
                 <a:cs typeface="Amiri" pitchFamily="2" charset="-78"/>
               </a:rPr>
               <a:t>هَلِ السَّفَرُ أَفْضَلُ مُعَلِّمٍ؟</a:t>
@@ -19588,6 +19731,7 @@
                   <a:srgbClr val="1B3B6F"/>
                 </a:solidFill>
                 <a:latin typeface="Amiri" pitchFamily="2" charset="-78"/>
+                <a:ea typeface="Amiri" pitchFamily="2" charset="-78"/>
                 <a:cs typeface="Amiri" pitchFamily="2" charset="-78"/>
               </a:rPr>
               <a:t>إِنَّ … ؛ فَإِذَا … فَسَيَحْفَظُهَا …</a:t>
@@ -19664,6 +19808,7 @@
                   <a:srgbClr val="1B3B6F"/>
                 </a:solidFill>
                 <a:latin typeface="Amiri" pitchFamily="2" charset="-78"/>
+                <a:ea typeface="Amiri" pitchFamily="2" charset="-78"/>
                 <a:cs typeface="Amiri" pitchFamily="2" charset="-78"/>
               </a:rPr>
               <a:t>كَيْفَ تُحَافِظُ الأُسَرُ المُهَاجِرَةُ عَلَى لُغَتِهَا؟</a:t>
@@ -19767,6 +19912,7 @@
                   <a:srgbClr val="1B3B6F"/>
                 </a:solidFill>
                 <a:latin typeface="Amiri" pitchFamily="2" charset="-78"/>
+                <a:ea typeface="Amiri" pitchFamily="2" charset="-78"/>
                 <a:cs typeface="Amiri" pitchFamily="2" charset="-78"/>
               </a:rPr>
               <a:t>تَعَلَّمْتُ أَنَّ … لَيْسَ … بَلْ …</a:t>
@@ -19843,6 +19989,7 @@
                   <a:srgbClr val="1B3B6F"/>
                 </a:solidFill>
                 <a:latin typeface="Amiri" pitchFamily="2" charset="-78"/>
+                <a:ea typeface="Amiri" pitchFamily="2" charset="-78"/>
                 <a:cs typeface="Amiri" pitchFamily="2" charset="-78"/>
               </a:rPr>
               <a:t>مَا الَّذِي تَعَلَّمْتَهُ مِنْ هٰذَا المِحْوَرِ عَنْ نَفْسِكَ؟</a:t>
@@ -19946,6 +20093,7 @@
                   <a:srgbClr val="1B3B6F"/>
                 </a:solidFill>
                 <a:latin typeface="Amiri" pitchFamily="2" charset="-78"/>
+                <a:ea typeface="Amiri" pitchFamily="2" charset="-78"/>
                 <a:cs typeface="Amiri" pitchFamily="2" charset="-78"/>
               </a:rPr>
               <a:t>لَوِ اسْتَطَعْتُ، لَجَعَلْتُ … لِكَيْ …</a:t>
@@ -20022,6 +20170,7 @@
                   <a:srgbClr val="1B3B6F"/>
                 </a:solidFill>
                 <a:latin typeface="Amiri" pitchFamily="2" charset="-78"/>
+                <a:ea typeface="Amiri" pitchFamily="2" charset="-78"/>
                 <a:cs typeface="Amiri" pitchFamily="2" charset="-78"/>
               </a:rPr>
               <a:t>لَوْ اسْتَطَعْتَ أَنْ تُغَيِّرَ شَيْئًا وَاحِدًا فِي العَالَمِ، فَمَا هُوَ؟</a:t>
@@ -20231,6 +20380,7 @@
                   <a:srgbClr val="D4AF37"/>
                 </a:solidFill>
                 <a:latin typeface="Amiri" pitchFamily="2" charset="-78"/>
+                <a:ea typeface="Amiri" pitchFamily="2" charset="-78"/>
                 <a:cs typeface="Amiri" pitchFamily="2" charset="-78"/>
               </a:rPr>
               <a:t>م</a:t>
@@ -20551,6 +20701,7 @@
                   <a:srgbClr val="8A6D1E"/>
                 </a:solidFill>
                 <a:latin typeface="Amiri" pitchFamily="2" charset="-78"/>
+                <a:ea typeface="Amiri" pitchFamily="2" charset="-78"/>
                 <a:cs typeface="Amiri" pitchFamily="2" charset="-78"/>
               </a:rPr>
               <a:t>آدَابُ الصَّفِّ</a:t>
@@ -22082,6 +22233,7 @@
                   <a:srgbClr val="D4AF37"/>
                 </a:solidFill>
                 <a:latin typeface="Amiri" pitchFamily="2" charset="-78"/>
+                <a:ea typeface="Amiri" pitchFamily="2" charset="-78"/>
                 <a:cs typeface="Amiri" pitchFamily="2" charset="-78"/>
               </a:rPr>
               <a:t>م</a:t>
@@ -22402,6 +22554,7 @@
                   <a:srgbClr val="8A6D1E"/>
                 </a:solidFill>
                 <a:latin typeface="Amiri" pitchFamily="2" charset="-78"/>
+                <a:ea typeface="Amiri" pitchFamily="2" charset="-78"/>
                 <a:cs typeface="Amiri" pitchFamily="2" charset="-78"/>
               </a:rPr>
               <a:t>نَمُوذَجُ الإِجَابَةِ</a:t>
@@ -22644,6 +22797,7 @@
                   <a:srgbClr val="1B3B6F"/>
                 </a:solidFill>
                 <a:latin typeface="Amiri" pitchFamily="2" charset="-78"/>
+                <a:ea typeface="Amiri" pitchFamily="2" charset="-78"/>
                 <a:cs typeface="Amiri" pitchFamily="2" charset="-78"/>
               </a:rPr>
               <a:t>أَنَا بَرِيطَانِيٌّ، وَأُسْرَتِي مِنَ العِرَاقِ.</a:t>
@@ -22720,6 +22874,7 @@
                   <a:srgbClr val="1B3B6F"/>
                 </a:solidFill>
                 <a:latin typeface="Amiri" pitchFamily="2" charset="-78"/>
+                <a:ea typeface="Amiri" pitchFamily="2" charset="-78"/>
                 <a:cs typeface="Amiri" pitchFamily="2" charset="-78"/>
               </a:rPr>
               <a:t>مَا جِنْسِيَّتُكَ؟ وَمِنْ أَيْنَ أُسْرَتُكَ؟</a:t>
@@ -22823,6 +22978,7 @@
                   <a:srgbClr val="1B3B6F"/>
                 </a:solidFill>
                 <a:latin typeface="Amiri" pitchFamily="2" charset="-78"/>
+                <a:ea typeface="Amiri" pitchFamily="2" charset="-78"/>
                 <a:cs typeface="Amiri" pitchFamily="2" charset="-78"/>
               </a:rPr>
               <a:t>أَتَكَلَّمُهَا مَعَ جَدِّي وَجَدَّتِي.</a:t>
@@ -22899,6 +23055,7 @@
                   <a:srgbClr val="1B3B6F"/>
                 </a:solidFill>
                 <a:latin typeface="Amiri" pitchFamily="2" charset="-78"/>
+                <a:ea typeface="Amiri" pitchFamily="2" charset="-78"/>
                 <a:cs typeface="Amiri" pitchFamily="2" charset="-78"/>
               </a:rPr>
               <a:t>مَعَ مَنْ تَتَكَلَّمُ العَرَبِيَّةَ؟</a:t>
@@ -23002,6 +23159,7 @@
                   <a:srgbClr val="1B3B6F"/>
                 </a:solidFill>
                 <a:latin typeface="Amiri" pitchFamily="2" charset="-78"/>
+                <a:ea typeface="Amiri" pitchFamily="2" charset="-78"/>
                 <a:cs typeface="Amiri" pitchFamily="2" charset="-78"/>
               </a:rPr>
               <a:t>نُقَدِّمُ الشَّايَ وَالكَعْكَ.</a:t>
@@ -23078,6 +23236,7 @@
                   <a:srgbClr val="1B3B6F"/>
                 </a:solidFill>
                 <a:latin typeface="Amiri" pitchFamily="2" charset="-78"/>
+                <a:ea typeface="Amiri" pitchFamily="2" charset="-78"/>
                 <a:cs typeface="Amiri" pitchFamily="2" charset="-78"/>
               </a:rPr>
               <a:t>مَاذَا تُقَدِّمُونَ لِلضُّيُوفِ؟</a:t>
@@ -23181,6 +23340,7 @@
                   <a:srgbClr val="1B3B6F"/>
                 </a:solidFill>
                 <a:latin typeface="Amiri" pitchFamily="2" charset="-78"/>
+                <a:ea typeface="Amiri" pitchFamily="2" charset="-78"/>
                 <a:cs typeface="Amiri" pitchFamily="2" charset="-78"/>
               </a:rPr>
               <a:t>أَوَّلًا نُصَلِّي، ثُمَّ نَزُورُ الأَقَارِبَ.</a:t>
@@ -23257,6 +23417,7 @@
                   <a:srgbClr val="1B3B6F"/>
                 </a:solidFill>
                 <a:latin typeface="Amiri" pitchFamily="2" charset="-78"/>
+                <a:ea typeface="Amiri" pitchFamily="2" charset="-78"/>
                 <a:cs typeface="Amiri" pitchFamily="2" charset="-78"/>
               </a:rPr>
               <a:t>كَيْفَ تَحْتَفِلُونَ بِالعِيدِ؟</a:t>
@@ -23360,6 +23521,7 @@
                   <a:srgbClr val="1B3B6F"/>
                 </a:solidFill>
                 <a:latin typeface="Amiri" pitchFamily="2" charset="-78"/>
+                <a:ea typeface="Amiri" pitchFamily="2" charset="-78"/>
                 <a:cs typeface="Amiri" pitchFamily="2" charset="-78"/>
               </a:rPr>
               <a:t>أُرِيدُ أَنْ أَزُورَ إِسْبَانْيَا، لِأَنَّ فِيهَا آثَارًا عَرَبِيَّةً.</a:t>
@@ -23436,6 +23598,7 @@
                   <a:srgbClr val="1B3B6F"/>
                 </a:solidFill>
                 <a:latin typeface="Amiri" pitchFamily="2" charset="-78"/>
+                <a:ea typeface="Amiri" pitchFamily="2" charset="-78"/>
                 <a:cs typeface="Amiri" pitchFamily="2" charset="-78"/>
               </a:rPr>
               <a:t>أَيُّ بَلَدٍ تُرِيدُ أَنْ تَزُورَ؟</a:t>
@@ -23645,6 +23808,7 @@
                   <a:srgbClr val="D4AF37"/>
                 </a:solidFill>
                 <a:latin typeface="Amiri" pitchFamily="2" charset="-78"/>
+                <a:ea typeface="Amiri" pitchFamily="2" charset="-78"/>
                 <a:cs typeface="Amiri" pitchFamily="2" charset="-78"/>
               </a:rPr>
               <a:t>م</a:t>
@@ -23965,6 +24129,7 @@
                   <a:srgbClr val="8A6D1E"/>
                 </a:solidFill>
                 <a:latin typeface="Amiri" pitchFamily="2" charset="-78"/>
+                <a:ea typeface="Amiri" pitchFamily="2" charset="-78"/>
                 <a:cs typeface="Amiri" pitchFamily="2" charset="-78"/>
               </a:rPr>
               <a:t>نَمُوذَجُ الإِجَابَةِ</a:t>
@@ -24207,6 +24372,7 @@
                   <a:srgbClr val="1B3B6F"/>
                 </a:solidFill>
                 <a:latin typeface="Amiri" pitchFamily="2" charset="-78"/>
+                <a:ea typeface="Amiri" pitchFamily="2" charset="-78"/>
                 <a:cs typeface="Amiri" pitchFamily="2" charset="-78"/>
               </a:rPr>
               <a:t>فِي البَيْتِ نَتَكَلَّمُ العَرَبِيَّةَ وَنَأْكُلُ مَعًا، بَيْنَمَا فِي المَدْرَسَةِ أَتَكَلَّمُ الإِنْجْلِيزِيَّةَ وَأَعِيشُ ثَقَافَةً أُخْرَى، لٰكِنَّنِي أُحِبُّ العَالَمَيْنِ.</a:t>
@@ -24286,6 +24452,7 @@
                   <a:srgbClr val="1B3B6F"/>
                 </a:solidFill>
                 <a:latin typeface="Amiri" pitchFamily="2" charset="-78"/>
+                <a:ea typeface="Amiri" pitchFamily="2" charset="-78"/>
                 <a:cs typeface="Amiri" pitchFamily="2" charset="-78"/>
               </a:rPr>
               <a:t>كَيْفَ تَخْتَلِفُ حَيَاتُكَ فِي البَيْتِ عَنْ حَيَاتِكَ فِي المَدْرَسَةِ؟</a:t>
@@ -24389,6 +24556,7 @@
                   <a:srgbClr val="1B3B6F"/>
                 </a:solidFill>
                 <a:latin typeface="Amiri" pitchFamily="2" charset="-78"/>
+                <a:ea typeface="Amiri" pitchFamily="2" charset="-78"/>
                 <a:cs typeface="Amiri" pitchFamily="2" charset="-78"/>
               </a:rPr>
               <a:t>حَضَرْتُ عِيدَ المِيلَادِ عِنْدَ جِيرَانِي؛ رَأَيْتُ الشَّجَرَةَ المُزَيَّنَةَ، وَتَعَلَّمْتُ أَنَّهُمْ يَجْتَمِعُونَ كَعَائِلَةٍ مِثْلَنَا تَمَامًا.</a:t>
@@ -24465,6 +24633,7 @@
                   <a:srgbClr val="1B3B6F"/>
                 </a:solidFill>
                 <a:latin typeface="Amiri" pitchFamily="2" charset="-78"/>
+                <a:ea typeface="Amiri" pitchFamily="2" charset="-78"/>
                 <a:cs typeface="Amiri" pitchFamily="2" charset="-78"/>
               </a:rPr>
               <a:t>صِفْ احْتِفَالًا حَضَرْتَهُ فِي ثَقَافَةٍ أُخْرَى.</a:t>
@@ -24568,6 +24737,7 @@
                   <a:srgbClr val="1B3B6F"/>
                 </a:solidFill>
                 <a:latin typeface="Amiri" pitchFamily="2" charset="-78"/>
+                <a:ea typeface="Amiri" pitchFamily="2" charset="-78"/>
                 <a:cs typeface="Amiri" pitchFamily="2" charset="-78"/>
               </a:rPr>
               <a:t>سَافَرْتُ إِلَى تُونِسَ؛ وَبِسَبَبِ الحَرِّ كُنَّا نَخْرُجُ فِي المَسَاءِ، فَاكْتَشَفْتُ أَنَّ الأَسْوَاقَ أَجْمَلُ فِي اللَّيْلِ.</a:t>
@@ -24644,6 +24814,7 @@
                   <a:srgbClr val="1B3B6F"/>
                 </a:solidFill>
                 <a:latin typeface="Amiri" pitchFamily="2" charset="-78"/>
+                <a:ea typeface="Amiri" pitchFamily="2" charset="-78"/>
                 <a:cs typeface="Amiri" pitchFamily="2" charset="-78"/>
               </a:rPr>
               <a:t>حَدِّثْنِي عَنْ رِحْلَةٍ إِلَى الخَارِجِ.</a:t>
@@ -24747,6 +24918,7 @@
                   <a:srgbClr val="1B3B6F"/>
                 </a:solidFill>
                 <a:latin typeface="Amiri" pitchFamily="2" charset="-78"/>
+                <a:ea typeface="Amiri" pitchFamily="2" charset="-78"/>
                 <a:cs typeface="Amiri" pitchFamily="2" charset="-78"/>
               </a:rPr>
               <a:t>كُنْتُ أَرَاهَا قَدِيمَةً، أَمَّا الآنَ فَأَرَاهَا كَنْزًا، لِأَنَّ أَصْدِقَائِي يُحِبُّونَ طَعَامَنَا وَقِصَصَنَا.</a:t>
@@ -24823,6 +24995,7 @@
                   <a:srgbClr val="1B3B6F"/>
                 </a:solidFill>
                 <a:latin typeface="Amiri" pitchFamily="2" charset="-78"/>
+                <a:ea typeface="Amiri" pitchFamily="2" charset="-78"/>
                 <a:cs typeface="Amiri" pitchFamily="2" charset="-78"/>
               </a:rPr>
               <a:t>هَلْ تَغَيَّرَتْ نَظْرَتُكَ إِلَى ثَقَافَتِكَ؟</a:t>
@@ -24926,6 +25099,7 @@
                   <a:srgbClr val="1B3B6F"/>
                 </a:solidFill>
                 <a:latin typeface="Amiri" pitchFamily="2" charset="-78"/>
+                <a:ea typeface="Amiri" pitchFamily="2" charset="-78"/>
                 <a:cs typeface="Amiri" pitchFamily="2" charset="-78"/>
               </a:rPr>
               <a:t>إِذَا دَرَسْتُ القَانُونَ الدُّوَلِيَّ، فَسَأَسْتَخْدِمُ لُغَاتِي لِمُسَاعَدَةِ اللَّاجِئِينَ فِي المَحَاكِمِ.</a:t>
@@ -25002,6 +25176,7 @@
                   <a:srgbClr val="1B3B6F"/>
                 </a:solidFill>
                 <a:latin typeface="Amiri" pitchFamily="2" charset="-78"/>
+                <a:ea typeface="Amiri" pitchFamily="2" charset="-78"/>
                 <a:cs typeface="Amiri" pitchFamily="2" charset="-78"/>
               </a:rPr>
               <a:t>كَيْفَ سَتَسْتَخْدِمُ لُغَاتِكَ فِي المُسْتَقْبَلِ؟</a:t>
@@ -25211,6 +25386,7 @@
                   <a:srgbClr val="D4AF37"/>
                 </a:solidFill>
                 <a:latin typeface="Amiri" pitchFamily="2" charset="-78"/>
+                <a:ea typeface="Amiri" pitchFamily="2" charset="-78"/>
                 <a:cs typeface="Amiri" pitchFamily="2" charset="-78"/>
               </a:rPr>
               <a:t>م</a:t>
@@ -25531,6 +25707,7 @@
                   <a:srgbClr val="8A6D1E"/>
                 </a:solidFill>
                 <a:latin typeface="Amiri" pitchFamily="2" charset="-78"/>
+                <a:ea typeface="Amiri" pitchFamily="2" charset="-78"/>
                 <a:cs typeface="Amiri" pitchFamily="2" charset="-78"/>
               </a:rPr>
               <a:t>نَمُوذَجُ الإِجَابَةِ</a:t>
@@ -25773,6 +25950,7 @@
                   <a:srgbClr val="1B3B6F"/>
                 </a:solidFill>
                 <a:latin typeface="Amiri" pitchFamily="2" charset="-78"/>
+                <a:ea typeface="Amiri" pitchFamily="2" charset="-78"/>
                 <a:cs typeface="Amiri" pitchFamily="2" charset="-78"/>
               </a:rPr>
               <a:t>صَحِيحٌ أَنَّ المَنْهَجَ مُزْدَحِمٌ، غَيْرَ أَنَّ مَعْرِفَةَ الآخَرِ لَمْ تَعُدْ تَرَفًا؛ فَنَحْنُ نَعِيشُ وَنَعْمَلُ مَعَهُ كُلَّ يَوْمٍ.</a:t>
@@ -25852,6 +26030,7 @@
                   <a:srgbClr val="1B3B6F"/>
                 </a:solidFill>
                 <a:latin typeface="Amiri" pitchFamily="2" charset="-78"/>
+                <a:ea typeface="Amiri" pitchFamily="2" charset="-78"/>
                 <a:cs typeface="Amiri" pitchFamily="2" charset="-78"/>
               </a:rPr>
               <a:t>هَلْ يَجِبُ أَنْ تُدَرَّسَ الأَدْيَانُ وَالثَّقَافَاتُ فِي كُلِّ المَدَارِسِ؟</a:t>
@@ -25955,6 +26134,7 @@
                   <a:srgbClr val="1B3B6F"/>
                 </a:solidFill>
                 <a:latin typeface="Amiri" pitchFamily="2" charset="-78"/>
+                <a:ea typeface="Amiri" pitchFamily="2" charset="-78"/>
                 <a:cs typeface="Amiri" pitchFamily="2" charset="-78"/>
               </a:rPr>
               <a:t>مِنْ نَاحِيَةٍ، يُرِينَا السَّفَرُ مَا لَا تُرِيهِ الكُتُبُ، وَمِنْ نَاحِيَةٍ أُخْرَى، لَا يَتَعَلَّمُ إِلَّا مَنْ يُسَافِرُ بِعَقْلٍ مَفْتُوحٍ.</a:t>
@@ -26031,6 +26211,7 @@
                   <a:srgbClr val="1B3B6F"/>
                 </a:solidFill>
                 <a:latin typeface="Amiri" pitchFamily="2" charset="-78"/>
+                <a:ea typeface="Amiri" pitchFamily="2" charset="-78"/>
                 <a:cs typeface="Amiri" pitchFamily="2" charset="-78"/>
               </a:rPr>
               <a:t>هَلِ السَّفَرُ أَفْضَلُ مُعَلِّمٍ؟</a:t>
@@ -26134,6 +26315,7 @@
                   <a:srgbClr val="1B3B6F"/>
                 </a:solidFill>
                 <a:latin typeface="Amiri" pitchFamily="2" charset="-78"/>
+                <a:ea typeface="Amiri" pitchFamily="2" charset="-78"/>
                 <a:cs typeface="Amiri" pitchFamily="2" charset="-78"/>
               </a:rPr>
               <a:t>إِنَّ البَيْتَ هُوَ المَدْرَسَةُ الأُولَى؛ فَإِذَا تَكَلَّمَ الوَالِدَانِ لُغَتَهُمَا كُلَّ يَوْمٍ وَقَرَأَا القِصَصَ، فَسَيَحْفَظُهَا الأَطْفَالُ دُونَ جُهْدٍ كَبِيرٍ.</a:t>
@@ -26210,6 +26392,7 @@
                   <a:srgbClr val="1B3B6F"/>
                 </a:solidFill>
                 <a:latin typeface="Amiri" pitchFamily="2" charset="-78"/>
+                <a:ea typeface="Amiri" pitchFamily="2" charset="-78"/>
                 <a:cs typeface="Amiri" pitchFamily="2" charset="-78"/>
               </a:rPr>
               <a:t>كَيْفَ تُحَافِظُ الأُسَرُ المُهَاجِرَةُ عَلَى لُغَتِهَا؟</a:t>
@@ -26419,6 +26602,7 @@
                   <a:srgbClr val="D4AF37"/>
                 </a:solidFill>
                 <a:latin typeface="Amiri" pitchFamily="2" charset="-78"/>
+                <a:ea typeface="Amiri" pitchFamily="2" charset="-78"/>
                 <a:cs typeface="Amiri" pitchFamily="2" charset="-78"/>
               </a:rPr>
               <a:t>م</a:t>
@@ -26739,6 +26923,7 @@
                   <a:srgbClr val="8A6D1E"/>
                 </a:solidFill>
                 <a:latin typeface="Amiri" pitchFamily="2" charset="-78"/>
+                <a:ea typeface="Amiri" pitchFamily="2" charset="-78"/>
                 <a:cs typeface="Amiri" pitchFamily="2" charset="-78"/>
               </a:rPr>
               <a:t>نَمُوذَجُ الإِجَابَةِ</a:t>
@@ -26981,6 +27166,7 @@
                   <a:srgbClr val="1B3B6F"/>
                 </a:solidFill>
                 <a:latin typeface="Amiri" pitchFamily="2" charset="-78"/>
+                <a:ea typeface="Amiri" pitchFamily="2" charset="-78"/>
                 <a:cs typeface="Amiri" pitchFamily="2" charset="-78"/>
               </a:rPr>
               <a:t>تَعَلَّمْتُ أَنَّ هُوِيَّتِي لَيْسَتْ شَيْئًا ثَابِتًا، بَلْ رِحْلَةٌ؛ فَكُلُّ لُغَةٍ أَتَعَلَّمُهَا وَكُلُّ صَدِيقٍ مِنْ ثَقَافَةٍ أُخْرَى يُضِيفُ إِلَيْهَا شَيْئًا جَمِيلًا.</a:t>
@@ -27057,6 +27243,7 @@
                   <a:srgbClr val="1B3B6F"/>
                 </a:solidFill>
                 <a:latin typeface="Amiri" pitchFamily="2" charset="-78"/>
+                <a:ea typeface="Amiri" pitchFamily="2" charset="-78"/>
                 <a:cs typeface="Amiri" pitchFamily="2" charset="-78"/>
               </a:rPr>
               <a:t>مَا الَّذِي تَعَلَّمْتَهُ مِنْ هٰذَا المِحْوَرِ عَنْ نَفْسِكَ؟</a:t>
@@ -27160,6 +27347,7 @@
                   <a:srgbClr val="1B3B6F"/>
                 </a:solidFill>
                 <a:latin typeface="Amiri" pitchFamily="2" charset="-78"/>
+                <a:ea typeface="Amiri" pitchFamily="2" charset="-78"/>
                 <a:cs typeface="Amiri" pitchFamily="2" charset="-78"/>
               </a:rPr>
               <a:t>لَوِ اسْتَطَعْتُ، لَجَعَلْتُ كُلَّ طِفْلٍ يَتَعَلَّمُ لُغَتَيْنِ وَيَزُورُ بَلَدًا آخَرَ، لِكَيْ يَكْبُرَ جِيلٌ لَا يَخَافُ مِنَ المُخْتَلِفِ.</a:t>
@@ -27239,6 +27427,7 @@
                   <a:srgbClr val="1B3B6F"/>
                 </a:solidFill>
                 <a:latin typeface="Amiri" pitchFamily="2" charset="-78"/>
+                <a:ea typeface="Amiri" pitchFamily="2" charset="-78"/>
                 <a:cs typeface="Amiri" pitchFamily="2" charset="-78"/>
               </a:rPr>
               <a:t>لَوْ اسْتَطَعْتَ أَنْ تُغَيِّرَ شَيْئًا وَاحِدًا فِي العَالَمِ، فَمَا هُوَ؟</a:t>
@@ -27448,6 +27637,7 @@
                   <a:srgbClr val="D4AF37"/>
                 </a:solidFill>
                 <a:latin typeface="Amiri" pitchFamily="2" charset="-78"/>
+                <a:ea typeface="Amiri" pitchFamily="2" charset="-78"/>
                 <a:cs typeface="Amiri" pitchFamily="2" charset="-78"/>
               </a:rPr>
               <a:t>م</a:t>
@@ -27768,6 +27958,7 @@
                   <a:srgbClr val="8A6D1E"/>
                 </a:solidFill>
                 <a:latin typeface="Amiri" pitchFamily="2" charset="-78"/>
+                <a:ea typeface="Amiri" pitchFamily="2" charset="-78"/>
                 <a:cs typeface="Amiri" pitchFamily="2" charset="-78"/>
               </a:rPr>
               <a:t>قَيِّمْ عَمَلَكَ</a:t>
@@ -29012,6 +29203,7 @@
                   <a:srgbClr val="FFFFFF"/>
                 </a:solidFill>
                 <a:latin typeface="Amiri" pitchFamily="2" charset="-78"/>
+                <a:ea typeface="Amiri" pitchFamily="2" charset="-78"/>
                 <a:cs typeface="Amiri" pitchFamily="2" charset="-78"/>
               </a:rPr>
               <a:t>أَحْسَنْتُمْ! إِلَى اللِّقَاءِ</a:t>
@@ -29164,6 +29356,7 @@
                   <a:srgbClr val="D4AF37"/>
                 </a:solidFill>
                 <a:latin typeface="Amiri" pitchFamily="2" charset="-78"/>
+                <a:ea typeface="Amiri" pitchFamily="2" charset="-78"/>
                 <a:cs typeface="Amiri" pitchFamily="2" charset="-78"/>
               </a:rPr>
               <a:t>وَرْشَةُ الكِتَابَةِ</a:t>
@@ -29297,6 +29490,7 @@
                   <a:srgbClr val="D4AF37"/>
                 </a:solidFill>
                 <a:latin typeface="Amiri" pitchFamily="2" charset="-78"/>
+                <a:ea typeface="Amiri" pitchFamily="2" charset="-78"/>
                 <a:cs typeface="Amiri" pitchFamily="2" charset="-78"/>
               </a:rPr>
               <a:t>م</a:t>
@@ -29617,6 +29811,7 @@
                   <a:srgbClr val="8A6D1E"/>
                 </a:solidFill>
                 <a:latin typeface="Amiri" pitchFamily="2" charset="-78"/>
+                <a:ea typeface="Amiri" pitchFamily="2" charset="-78"/>
                 <a:cs typeface="Amiri" pitchFamily="2" charset="-78"/>
               </a:rPr>
               <a:t>خَرِيطَةُ الوَرْشَةِ</a:t>
@@ -29931,6 +30126,7 @@
                   <a:srgbClr val="1B3B6F"/>
                 </a:solidFill>
                 <a:latin typeface="Amiri" pitchFamily="2" charset="-78"/>
+                <a:ea typeface="Amiri" pitchFamily="2" charset="-78"/>
                 <a:cs typeface="Amiri" pitchFamily="2" charset="-78"/>
               </a:rPr>
               <a:t>كَيْفَ</a:t>
@@ -30207,6 +30403,7 @@
                   <a:srgbClr val="1E6B52"/>
                 </a:solidFill>
                 <a:latin typeface="Amiri" pitchFamily="2" charset="-78"/>
+                <a:ea typeface="Amiri" pitchFamily="2" charset="-78"/>
                 <a:cs typeface="Amiri" pitchFamily="2" charset="-78"/>
               </a:rPr>
               <a:t>تَمْثِيلُ الدَّوْرِ</a:t>
@@ -30483,6 +30680,7 @@
                   <a:srgbClr val="8A6D1E"/>
                 </a:solidFill>
                 <a:latin typeface="Amiri" pitchFamily="2" charset="-78"/>
+                <a:ea typeface="Amiri" pitchFamily="2" charset="-78"/>
                 <a:cs typeface="Amiri" pitchFamily="2" charset="-78"/>
               </a:rPr>
               <a:t>النَّمُوذَجُ</a:t>
@@ -30759,6 +30957,7 @@
                   <a:srgbClr val="1E6B52"/>
                 </a:solidFill>
                 <a:latin typeface="Amiri" pitchFamily="2" charset="-78"/>
+                <a:ea typeface="Amiri" pitchFamily="2" charset="-78"/>
                 <a:cs typeface="Amiri" pitchFamily="2" charset="-78"/>
               </a:rPr>
               <a:t>المُحَادَثَةُ</a:t>
@@ -31035,6 +31234,7 @@
                   <a:srgbClr val="8A6D1E"/>
                 </a:solidFill>
                 <a:latin typeface="Amiri" pitchFamily="2" charset="-78"/>
+                <a:ea typeface="Amiri" pitchFamily="2" charset="-78"/>
                 <a:cs typeface="Amiri" pitchFamily="2" charset="-78"/>
               </a:rPr>
               <a:t>قَيِّمْ</a:t>
@@ -31278,6 +31478,7 @@
                   <a:srgbClr val="D4AF37"/>
                 </a:solidFill>
                 <a:latin typeface="Amiri" pitchFamily="2" charset="-78"/>
+                <a:ea typeface="Amiri" pitchFamily="2" charset="-78"/>
                 <a:cs typeface="Amiri" pitchFamily="2" charset="-78"/>
               </a:rPr>
               <a:t>م</a:t>
@@ -31598,6 +31799,7 @@
                   <a:srgbClr val="8A6D1E"/>
                 </a:solidFill>
                 <a:latin typeface="Amiri" pitchFamily="2" charset="-78"/>
+                <a:ea typeface="Amiri" pitchFamily="2" charset="-78"/>
                 <a:cs typeface="Amiri" pitchFamily="2" charset="-78"/>
               </a:rPr>
               <a:t>امْتِحَانُ التَّحَدُّثِ</a:t>
@@ -32222,6 +32424,7 @@
                   <a:srgbClr val="1B3B6F"/>
                 </a:solidFill>
                 <a:latin typeface="Amiri" pitchFamily="2" charset="-78"/>
+                <a:ea typeface="Amiri" pitchFamily="2" charset="-78"/>
                 <a:cs typeface="Amiri" pitchFamily="2" charset="-78"/>
               </a:rPr>
               <a:t>عَفْوًا، هَلْ يُمْكِنُ أَنْ تُعِيدَ السُّؤَالَ؟</a:t>
@@ -32321,6 +32524,7 @@
                   <a:srgbClr val="1B3B6F"/>
                 </a:solidFill>
                 <a:latin typeface="Amiri" pitchFamily="2" charset="-78"/>
+                <a:ea typeface="Amiri" pitchFamily="2" charset="-78"/>
                 <a:cs typeface="Amiri" pitchFamily="2" charset="-78"/>
               </a:rPr>
               <a:t>لَحْظَةً، دَعْنِي أُفَكِّرُ …</a:t>
@@ -32420,6 +32624,7 @@
                   <a:srgbClr val="1B3B6F"/>
                 </a:solidFill>
                 <a:latin typeface="Amiri" pitchFamily="2" charset="-78"/>
+                <a:ea typeface="Amiri" pitchFamily="2" charset="-78"/>
                 <a:cs typeface="Amiri" pitchFamily="2" charset="-78"/>
               </a:rPr>
               <a:t>أَقْصِدُ …</a:t>
@@ -32591,6 +32796,7 @@
                   <a:srgbClr val="D4AF37"/>
                 </a:solidFill>
                 <a:latin typeface="Amiri" pitchFamily="2" charset="-78"/>
+                <a:ea typeface="Amiri" pitchFamily="2" charset="-78"/>
                 <a:cs typeface="Amiri" pitchFamily="2" charset="-78"/>
               </a:rPr>
               <a:t>م</a:t>
@@ -32911,6 +33117,7 @@
                   <a:srgbClr val="8A6D1E"/>
                 </a:solidFill>
                 <a:latin typeface="Amiri" pitchFamily="2" charset="-78"/>
+                <a:ea typeface="Amiri" pitchFamily="2" charset="-78"/>
                 <a:cs typeface="Amiri" pitchFamily="2" charset="-78"/>
               </a:rPr>
               <a:t>المِحْوَرُ الخَامِسُ فِي اثْنَتَيْ عَشْرَةَ بِنْيَةً</a:t>
@@ -33214,6 +33421,7 @@
                   <a:srgbClr val="1B3B6F"/>
                 </a:solidFill>
                 <a:latin typeface="Amiri" pitchFamily="2" charset="-78"/>
+                <a:ea typeface="Amiri" pitchFamily="2" charset="-78"/>
                 <a:cs typeface="Amiri" pitchFamily="2" charset="-78"/>
               </a:rPr>
               <a:t>مِصْرِيٌّ · مِصْرِيَّةٌ · مِصْرِيُّونَ</a:t>
@@ -33371,6 +33579,7 @@
                   <a:srgbClr val="1B3B6F"/>
                 </a:solidFill>
                 <a:latin typeface="Amiri" pitchFamily="2" charset="-78"/>
+                <a:ea typeface="Amiri" pitchFamily="2" charset="-78"/>
                 <a:cs typeface="Amiri" pitchFamily="2" charset="-78"/>
               </a:rPr>
               <a:t>فِي شَمَالِ</a:t>
@@ -33474,6 +33683,7 @@
                   <a:srgbClr val="1B3B6F"/>
                 </a:solidFill>
                 <a:latin typeface="Amiri" pitchFamily="2" charset="-78"/>
+                <a:ea typeface="Amiri" pitchFamily="2" charset="-78"/>
                 <a:cs typeface="Amiri" pitchFamily="2" charset="-78"/>
               </a:rPr>
               <a:t>يَقَعُ / تَقَعُ فِي</a:t>
@@ -33739,6 +33949,7 @@
                   <a:srgbClr val="1B3B6F"/>
                 </a:solidFill>
                 <a:latin typeface="Amiri" pitchFamily="2" charset="-78"/>
+                <a:ea typeface="Amiri" pitchFamily="2" charset="-78"/>
                 <a:cs typeface="Amiri" pitchFamily="2" charset="-78"/>
               </a:rPr>
               <a:t>اللُّغَةُ الَّتِي أَتَكَلَّمُهَا</a:t>
@@ -33788,11 +33999,12 @@
               <a:buNone/>
             </a:pPr>
             <a:r>
-              <a:rPr lang="en-US" sz="1100" i="1" dirty="0">
+              <a:rPr lang="ar-SA" sz="1100" i="1" dirty="0">
                 <a:solidFill>
                   <a:srgbClr val="5A6472"/>
                 </a:solidFill>
                 <a:latin typeface="Calibri" pitchFamily="34" charset="0"/>
+                <a:ea typeface="Amiri" pitchFamily="2" charset="-78"/>
                 <a:cs typeface="Amiri" pitchFamily="2" charset="-78"/>
               </a:rPr>
               <a:t>all-lu-gha-tu al-َ-tī a-ta-kal-la-mu-hā</a:t>
@@ -33896,6 +34108,7 @@
                   <a:srgbClr val="1B3B6F"/>
                 </a:solidFill>
                 <a:latin typeface="Amiri" pitchFamily="2" charset="-78"/>
+                <a:ea typeface="Amiri" pitchFamily="2" charset="-78"/>
                 <a:cs typeface="Amiri" pitchFamily="2" charset="-78"/>
               </a:rPr>
               <a:t>التَّوَاصُلُ</a:t>
@@ -33999,6 +34212,7 @@
                   <a:srgbClr val="1B3B6F"/>
                 </a:solidFill>
                 <a:latin typeface="Amiri" pitchFamily="2" charset="-78"/>
+                <a:ea typeface="Amiri" pitchFamily="2" charset="-78"/>
                 <a:cs typeface="Amiri" pitchFamily="2" charset="-78"/>
               </a:rPr>
               <a:t>تَعَلُّمُ</a:t>
@@ -34264,6 +34478,7 @@
                   <a:srgbClr val="1B3B6F"/>
                 </a:solidFill>
                 <a:latin typeface="Amiri" pitchFamily="2" charset="-78"/>
+                <a:ea typeface="Amiri" pitchFamily="2" charset="-78"/>
                 <a:cs typeface="Amiri" pitchFamily="2" charset="-78"/>
               </a:rPr>
               <a:t>إِنَّ ثَقَافَتَنَا …</a:t>
@@ -34421,6 +34636,7 @@
                   <a:srgbClr val="1B3B6F"/>
                 </a:solidFill>
                 <a:latin typeface="Amiri" pitchFamily="2" charset="-78"/>
+                <a:ea typeface="Amiri" pitchFamily="2" charset="-78"/>
                 <a:cs typeface="Amiri" pitchFamily="2" charset="-78"/>
               </a:rPr>
               <a:t>مَثَلًا</a:t>
@@ -34524,6 +34740,7 @@
                   <a:srgbClr val="1B3B6F"/>
                 </a:solidFill>
                 <a:latin typeface="Amiri" pitchFamily="2" charset="-78"/>
+                <a:ea typeface="Amiri" pitchFamily="2" charset="-78"/>
                 <a:cs typeface="Amiri" pitchFamily="2" charset="-78"/>
               </a:rPr>
               <a:t>هُوِيَّتِي</a:t>
@@ -34789,6 +35006,7 @@
                   <a:srgbClr val="1B3B6F"/>
                 </a:solidFill>
                 <a:latin typeface="Amiri" pitchFamily="2" charset="-78"/>
+                <a:ea typeface="Amiri" pitchFamily="2" charset="-78"/>
                 <a:cs typeface="Amiri" pitchFamily="2" charset="-78"/>
               </a:rPr>
               <a:t>اِخْلَعْ · لَا تَرْفُضْ</a:t>
@@ -34946,6 +35164,7 @@
                   <a:srgbClr val="1B3B6F"/>
                 </a:solidFill>
                 <a:latin typeface="Amiri" pitchFamily="2" charset="-78"/>
+                <a:ea typeface="Amiri" pitchFamily="2" charset="-78"/>
                 <a:cs typeface="Amiri" pitchFamily="2" charset="-78"/>
               </a:rPr>
               <a:t>يَنْبَغِي أَنْ</a:t>
@@ -35049,6 +35268,7 @@
                   <a:srgbClr val="1B3B6F"/>
                 </a:solidFill>
                 <a:latin typeface="Amiri" pitchFamily="2" charset="-78"/>
+                <a:ea typeface="Amiri" pitchFamily="2" charset="-78"/>
                 <a:cs typeface="Amiri" pitchFamily="2" charset="-78"/>
               </a:rPr>
               <a:t>اِخْلَعِي · لَا تَرْفُضِي</a:t>
@@ -35314,6 +35534,7 @@
                   <a:srgbClr val="1B3B6F"/>
                 </a:solidFill>
                 <a:latin typeface="Amiri" pitchFamily="2" charset="-78"/>
+                <a:ea typeface="Amiri" pitchFamily="2" charset="-78"/>
                 <a:cs typeface="Amiri" pitchFamily="2" charset="-78"/>
               </a:rPr>
               <a:t>المَسْجِدُ الَّذِي … · الكَنِيسَةُ الَّتِي …</a:t>
@@ -35363,11 +35584,12 @@
               <a:buNone/>
             </a:pPr>
             <a:r>
-              <a:rPr lang="en-US" sz="1100" i="1" dirty="0">
+              <a:rPr lang="ar-SA" sz="1100" i="1" dirty="0">
                 <a:solidFill>
                   <a:srgbClr val="5A6472"/>
                 </a:solidFill>
                 <a:latin typeface="Calibri" pitchFamily="34" charset="0"/>
+                <a:ea typeface="Amiri" pitchFamily="2" charset="-78"/>
                 <a:cs typeface="Amiri" pitchFamily="2" charset="-78"/>
               </a:rPr>
               <a:t>al-mas-ji-du al-َ-dhī … · al-ka-nī-sa-tu al-َ-tī …</a:t>
@@ -35471,6 +35693,7 @@
                   <a:srgbClr val="1B3B6F"/>
                 </a:solidFill>
                 <a:latin typeface="Amiri" pitchFamily="2" charset="-78"/>
+                <a:ea typeface="Amiri" pitchFamily="2" charset="-78"/>
                 <a:cs typeface="Amiri" pitchFamily="2" charset="-78"/>
               </a:rPr>
               <a:t>أَحْتَرِمُ</a:t>
@@ -35574,6 +35797,7 @@
                   <a:srgbClr val="1B3B6F"/>
                 </a:solidFill>
                 <a:latin typeface="Amiri" pitchFamily="2" charset="-78"/>
+                <a:ea typeface="Amiri" pitchFamily="2" charset="-78"/>
                 <a:cs typeface="Amiri" pitchFamily="2" charset="-78"/>
               </a:rPr>
               <a:t>بِجَانِبِ</a:t>
@@ -35839,6 +36063,7 @@
                   <a:srgbClr val="1B3B6F"/>
                 </a:solidFill>
                 <a:latin typeface="Amiri" pitchFamily="2" charset="-78"/>
+                <a:ea typeface="Amiri" pitchFamily="2" charset="-78"/>
                 <a:cs typeface="Amiri" pitchFamily="2" charset="-78"/>
               </a:rPr>
               <a:t>زُرْنَاهُمْ · اشْتَرَيْتُهَا</a:t>
@@ -35996,6 +36221,7 @@
                   <a:srgbClr val="1B3B6F"/>
                 </a:solidFill>
                 <a:latin typeface="Amiri" pitchFamily="2" charset="-78"/>
+                <a:ea typeface="Amiri" pitchFamily="2" charset="-78"/>
                 <a:cs typeface="Amiri" pitchFamily="2" charset="-78"/>
               </a:rPr>
               <a:t>أَخِيرًا</a:t>
@@ -36099,6 +36325,7 @@
                   <a:srgbClr val="1B3B6F"/>
                 </a:solidFill>
                 <a:latin typeface="Amiri" pitchFamily="2" charset="-78"/>
+                <a:ea typeface="Amiri" pitchFamily="2" charset="-78"/>
                 <a:cs typeface="Amiri" pitchFamily="2" charset="-78"/>
               </a:rPr>
               <a:t>أَوَّلًا … ثُمَّ</a:t>
@@ -36232,6 +36459,7 @@
                   <a:srgbClr val="D4AF37"/>
                 </a:solidFill>
                 <a:latin typeface="Amiri" pitchFamily="2" charset="-78"/>
+                <a:ea typeface="Amiri" pitchFamily="2" charset="-78"/>
                 <a:cs typeface="Amiri" pitchFamily="2" charset="-78"/>
               </a:rPr>
               <a:t>م</a:t>
@@ -36552,6 +36780,7 @@
                   <a:srgbClr val="8A6D1E"/>
                 </a:solidFill>
                 <a:latin typeface="Amiri" pitchFamily="2" charset="-78"/>
+                <a:ea typeface="Amiri" pitchFamily="2" charset="-78"/>
                 <a:cs typeface="Amiri" pitchFamily="2" charset="-78"/>
               </a:rPr>
               <a:t>بِنْيَاتٌ تَرْفَعُ الدَّرَجَةَ</a:t>
@@ -36855,6 +37084,7 @@
                   <a:srgbClr val="1B3B6F"/>
                 </a:solidFill>
                 <a:latin typeface="Amiri" pitchFamily="2" charset="-78"/>
+                <a:ea typeface="Amiri" pitchFamily="2" charset="-78"/>
                 <a:cs typeface="Amiri" pitchFamily="2" charset="-78"/>
               </a:rPr>
               <a:t>يُحْتَفَلُ بِهِ</a:t>
@@ -37012,6 +37242,7 @@
                   <a:srgbClr val="1B3B6F"/>
                 </a:solidFill>
                 <a:latin typeface="Amiri" pitchFamily="2" charset="-78"/>
+                <a:ea typeface="Amiri" pitchFamily="2" charset="-78"/>
                 <a:cs typeface="Amiri" pitchFamily="2" charset="-78"/>
               </a:rPr>
               <a:t>صُنِعَ</a:t>
@@ -37115,6 +37346,7 @@
                   <a:srgbClr val="1B3B6F"/>
                 </a:solidFill>
                 <a:latin typeface="Amiri" pitchFamily="2" charset="-78"/>
+                <a:ea typeface="Amiri" pitchFamily="2" charset="-78"/>
                 <a:cs typeface="Amiri" pitchFamily="2" charset="-78"/>
               </a:rPr>
               <a:t>تُرْفَعُ الأَعْلَامُ</a:t>
@@ -37380,6 +37612,7 @@
                   <a:srgbClr val="1B3B6F"/>
                 </a:solidFill>
                 <a:latin typeface="Amiri" pitchFamily="2" charset="-78"/>
+                <a:ea typeface="Amiri" pitchFamily="2" charset="-78"/>
                 <a:cs typeface="Amiri" pitchFamily="2" charset="-78"/>
               </a:rPr>
               <a:t>بِسَبَبِ … مِمَّا …</a:t>
@@ -37537,6 +37770,7 @@
                   <a:srgbClr val="1B3B6F"/>
                 </a:solidFill>
                 <a:latin typeface="Amiri" pitchFamily="2" charset="-78"/>
+                <a:ea typeface="Amiri" pitchFamily="2" charset="-78"/>
                 <a:cs typeface="Amiri" pitchFamily="2" charset="-78"/>
               </a:rPr>
               <a:t>نَتِيجَةً لِذٰلِكَ</a:t>
@@ -37640,6 +37874,7 @@
                   <a:srgbClr val="1B3B6F"/>
                 </a:solidFill>
                 <a:latin typeface="Amiri" pitchFamily="2" charset="-78"/>
+                <a:ea typeface="Amiri" pitchFamily="2" charset="-78"/>
                 <a:cs typeface="Amiri" pitchFamily="2" charset="-78"/>
               </a:rPr>
               <a:t>لِذٰلِكَ</a:t>
@@ -37905,6 +38140,7 @@
                   <a:srgbClr val="1B3B6F"/>
                 </a:solidFill>
                 <a:latin typeface="Amiri" pitchFamily="2" charset="-78"/>
+                <a:ea typeface="Amiri" pitchFamily="2" charset="-78"/>
                 <a:cs typeface="Amiri" pitchFamily="2" charset="-78"/>
               </a:rPr>
               <a:t>بَيْنَمَا · أَمَّا … فَهُوَ …</a:t>
@@ -38062,6 +38298,7 @@
                   <a:srgbClr val="1B3B6F"/>
                 </a:solidFill>
                 <a:latin typeface="Amiri" pitchFamily="2" charset="-78"/>
+                <a:ea typeface="Amiri" pitchFamily="2" charset="-78"/>
                 <a:cs typeface="Amiri" pitchFamily="2" charset="-78"/>
               </a:rPr>
               <a:t>مُخْتَلِفٌ لَا أَفْضَلُ</a:t>
@@ -38165,6 +38402,7 @@
                   <a:srgbClr val="1B3B6F"/>
                 </a:solidFill>
                 <a:latin typeface="Amiri" pitchFamily="2" charset="-78"/>
+                <a:ea typeface="Amiri" pitchFamily="2" charset="-78"/>
                 <a:cs typeface="Amiri" pitchFamily="2" charset="-78"/>
               </a:rPr>
               <a:t>أَكْبَرُ مِنْ</a:t>
@@ -38430,6 +38668,7 @@
                   <a:srgbClr val="1B3B6F"/>
                 </a:solidFill>
                 <a:latin typeface="Amiri" pitchFamily="2" charset="-78"/>
+                <a:ea typeface="Amiri" pitchFamily="2" charset="-78"/>
                 <a:cs typeface="Amiri" pitchFamily="2" charset="-78"/>
               </a:rPr>
               <a:t>إِذَا … فَسَأُسَافِرُ</a:t>
@@ -38587,6 +38826,7 @@
                   <a:srgbClr val="1B3B6F"/>
                 </a:solidFill>
                 <a:latin typeface="Amiri" pitchFamily="2" charset="-78"/>
+                <a:ea typeface="Amiri" pitchFamily="2" charset="-78"/>
                 <a:cs typeface="Amiri" pitchFamily="2" charset="-78"/>
               </a:rPr>
               <a:t>وَمِنْ نَاحِيَةٍ أُخْرَى</a:t>
@@ -38690,6 +38930,7 @@
                   <a:srgbClr val="1B3B6F"/>
                 </a:solidFill>
                 <a:latin typeface="Amiri" pitchFamily="2" charset="-78"/>
+                <a:ea typeface="Amiri" pitchFamily="2" charset="-78"/>
                 <a:cs typeface="Amiri" pitchFamily="2" charset="-78"/>
               </a:rPr>
               <a:t>مِنْ نَاحِيَةٍ</a:t>
@@ -38955,6 +39196,7 @@
                   <a:srgbClr val="1B3B6F"/>
                 </a:solidFill>
                 <a:latin typeface="Amiri" pitchFamily="2" charset="-78"/>
+                <a:ea typeface="Amiri" pitchFamily="2" charset="-78"/>
                 <a:cs typeface="Amiri" pitchFamily="2" charset="-78"/>
               </a:rPr>
               <a:t>أَوَّلًا · بِالإِضَافَةِ إِلَى ذٰلِكَ</a:t>
@@ -39112,6 +39354,7 @@
                   <a:srgbClr val="1B3B6F"/>
                 </a:solidFill>
                 <a:latin typeface="Amiri" pitchFamily="2" charset="-78"/>
+                <a:ea typeface="Amiri" pitchFamily="2" charset="-78"/>
                 <a:cs typeface="Amiri" pitchFamily="2" charset="-78"/>
               </a:rPr>
               <a:t>لِذٰلِكَ</a:t>
@@ -39215,6 +39458,7 @@
                   <a:srgbClr val="1B3B6F"/>
                 </a:solidFill>
                 <a:latin typeface="Amiri" pitchFamily="2" charset="-78"/>
+                <a:ea typeface="Amiri" pitchFamily="2" charset="-78"/>
                 <a:cs typeface="Amiri" pitchFamily="2" charset="-78"/>
               </a:rPr>
               <a:t>مَعَ ذٰلِكَ</a:t>
@@ -39480,6 +39724,7 @@
                   <a:srgbClr val="1B3B6F"/>
                 </a:solidFill>
                 <a:latin typeface="Amiri" pitchFamily="2" charset="-78"/>
+                <a:ea typeface="Amiri" pitchFamily="2" charset="-78"/>
                 <a:cs typeface="Amiri" pitchFamily="2" charset="-78"/>
               </a:rPr>
               <a:t>صَحِيحٌ أَنَّ … غَيْرَ أَنَّ …</a:t>
@@ -39637,6 +39882,7 @@
                   <a:srgbClr val="1B3B6F"/>
                 </a:solidFill>
                 <a:latin typeface="Amiri" pitchFamily="2" charset="-78"/>
+                <a:ea typeface="Amiri" pitchFamily="2" charset="-78"/>
                 <a:cs typeface="Amiri" pitchFamily="2" charset="-78"/>
               </a:rPr>
               <a:t>لَيْسَ … بَلْ</a:t>
@@ -39740,6 +39986,7 @@
                   <a:srgbClr val="1B3B6F"/>
                 </a:solidFill>
                 <a:latin typeface="Amiri" pitchFamily="2" charset="-78"/>
+                <a:ea typeface="Amiri" pitchFamily="2" charset="-78"/>
                 <a:cs typeface="Amiri" pitchFamily="2" charset="-78"/>
               </a:rPr>
               <a:t>لَوْ كُنْتُ … لَاخْتَرْتُ</a:t>
@@ -39873,6 +40120,7 @@
                   <a:srgbClr val="D4AF37"/>
                 </a:solidFill>
                 <a:latin typeface="Amiri" pitchFamily="2" charset="-78"/>
+                <a:ea typeface="Amiri" pitchFamily="2" charset="-78"/>
                 <a:cs typeface="Amiri" pitchFamily="2" charset="-78"/>
               </a:rPr>
               <a:t>م</a:t>
@@ -40193,6 +40441,7 @@
                   <a:srgbClr val="8A6D1E"/>
                 </a:solidFill>
                 <a:latin typeface="Amiri" pitchFamily="2" charset="-78"/>
+                <a:ea typeface="Amiri" pitchFamily="2" charset="-78"/>
                 <a:cs typeface="Amiri" pitchFamily="2" charset="-78"/>
               </a:rPr>
               <a:t>فِي الغُرَفِ</a:t>
@@ -41369,6 +41618,7 @@
                   <a:srgbClr val="1B3B6F"/>
                 </a:solidFill>
                 <a:latin typeface="Amiri" pitchFamily="2" charset="-78"/>
+                <a:ea typeface="Amiri" pitchFamily="2" charset="-78"/>
                 <a:cs typeface="Amiri" pitchFamily="2" charset="-78"/>
               </a:rPr>
               <a:t>دَوْرُكَ!</a:t>
@@ -41445,6 +41695,7 @@
                   <a:srgbClr val="1B3B6F"/>
                 </a:solidFill>
                 <a:latin typeface="Amiri" pitchFamily="2" charset="-78"/>
+                <a:ea typeface="Amiri" pitchFamily="2" charset="-78"/>
                 <a:cs typeface="Amiri" pitchFamily="2" charset="-78"/>
               </a:rPr>
               <a:t>أَحْسَنْتَ! / أَحْسَنْتِ!</a:t>
@@ -41521,6 +41772,7 @@
                   <a:srgbClr val="1B3B6F"/>
                 </a:solidFill>
                 <a:latin typeface="Amiri" pitchFamily="2" charset="-78"/>
+                <a:ea typeface="Amiri" pitchFamily="2" charset="-78"/>
                 <a:cs typeface="Amiri" pitchFamily="2" charset="-78"/>
               </a:rPr>
               <a:t>تَكَلَّمْ أَكْثَرَ، مِنْ فَضْلِكَ</a:t>
@@ -41597,6 +41849,7 @@
                   <a:srgbClr val="1B3B6F"/>
                 </a:solidFill>
                 <a:latin typeface="Amiri" pitchFamily="2" charset="-78"/>
+                <a:ea typeface="Amiri" pitchFamily="2" charset="-78"/>
                 <a:cs typeface="Amiri" pitchFamily="2" charset="-78"/>
               </a:rPr>
               <a:t>لِمَاذَا؟</a:t>
@@ -41768,6 +42021,7 @@
                   <a:srgbClr val="D4AF37"/>
                 </a:solidFill>
                 <a:latin typeface="Amiri" pitchFamily="2" charset="-78"/>
+                <a:ea typeface="Amiri" pitchFamily="2" charset="-78"/>
                 <a:cs typeface="Amiri" pitchFamily="2" charset="-78"/>
               </a:rPr>
               <a:t>م</a:t>
@@ -42088,6 +42342,7 @@
                   <a:srgbClr val="8A6D1E"/>
                 </a:solidFill>
                 <a:latin typeface="Amiri" pitchFamily="2" charset="-78"/>
+                <a:ea typeface="Amiri" pitchFamily="2" charset="-78"/>
                 <a:cs typeface="Amiri" pitchFamily="2" charset="-78"/>
               </a:rPr>
               <a:t>اسْتِقْبَالُ طَالِبَةِ التَّبَادُلِ</a:t>
@@ -42368,6 +42623,7 @@
                   <a:srgbClr val="1B3B6F"/>
                 </a:solidFill>
                 <a:latin typeface="Amiri" pitchFamily="2" charset="-78"/>
+                <a:ea typeface="Amiri" pitchFamily="2" charset="-78"/>
                 <a:cs typeface="Amiri" pitchFamily="2" charset="-78"/>
               </a:rPr>
               <a:t>أَهْلًا وَسَهْلًا! أَنَا …</a:t>
@@ -42444,6 +42700,7 @@
                   <a:srgbClr val="1B3B6F"/>
                 </a:solidFill>
                 <a:latin typeface="Amiri" pitchFamily="2" charset="-78"/>
+                <a:ea typeface="Amiri" pitchFamily="2" charset="-78"/>
                 <a:cs typeface="Amiri" pitchFamily="2" charset="-78"/>
               </a:rPr>
               <a:t>مَرْحَبًا! أَنَا لَمَى مِنْ عَمَّانَ.</a:t>
@@ -42612,6 +42869,7 @@
                   <a:srgbClr val="1B3B6F"/>
                 </a:solidFill>
                 <a:latin typeface="Amiri" pitchFamily="2" charset="-78"/>
+                <a:ea typeface="Amiri" pitchFamily="2" charset="-78"/>
                 <a:cs typeface="Amiri" pitchFamily="2" charset="-78"/>
               </a:rPr>
               <a:t>أَتَكَلَّمُ …</a:t>
@@ -42688,6 +42946,7 @@
                   <a:srgbClr val="1B3B6F"/>
                 </a:solidFill>
                 <a:latin typeface="Amiri" pitchFamily="2" charset="-78"/>
+                <a:ea typeface="Amiri" pitchFamily="2" charset="-78"/>
                 <a:cs typeface="Amiri" pitchFamily="2" charset="-78"/>
               </a:rPr>
               <a:t>كَمْ لُغَةً تَتَكَلَّمِينَ؟</a:t>
@@ -42856,6 +43115,7 @@
                   <a:srgbClr val="1B3B6F"/>
                 </a:solidFill>
                 <a:latin typeface="Amiri" pitchFamily="2" charset="-78"/>
+                <a:ea typeface="Amiri" pitchFamily="2" charset="-78"/>
                 <a:cs typeface="Amiri" pitchFamily="2" charset="-78"/>
               </a:rPr>
               <a:t>هَلْ … ؟ كَمْ سَاعَةً …؟</a:t>
@@ -42932,6 +43192,7 @@
                   <a:srgbClr val="1B3B6F"/>
                 </a:solidFill>
                 <a:latin typeface="Amiri" pitchFamily="2" charset="-78"/>
+                <a:ea typeface="Amiri" pitchFamily="2" charset="-78"/>
                 <a:cs typeface="Amiri" pitchFamily="2" charset="-78"/>
               </a:rPr>
               <a:t>جَمِيلٌ! الرِّحْلَةُ كَانَتْ طَوِيلَةً.</a:t>
@@ -43100,6 +43361,7 @@
                   <a:srgbClr val="1B3B6F"/>
                 </a:solidFill>
                 <a:latin typeface="Amiri" pitchFamily="2" charset="-78"/>
+                <a:ea typeface="Amiri" pitchFamily="2" charset="-78"/>
                 <a:cs typeface="Amiri" pitchFamily="2" charset="-78"/>
               </a:rPr>
               <a:t>سَنَذْهَبُ إِلَى … ثُمَّ …</a:t>
@@ -43176,6 +43438,7 @@
                   <a:srgbClr val="1B3B6F"/>
                 </a:solidFill>
                 <a:latin typeface="Amiri" pitchFamily="2" charset="-78"/>
+                <a:ea typeface="Amiri" pitchFamily="2" charset="-78"/>
                 <a:cs typeface="Amiri" pitchFamily="2" charset="-78"/>
               </a:rPr>
               <a:t>سِتُّ سَاعَاتٍ. مَاذَا سَنَفْعَلُ اليَوْمَ؟</a:t>
@@ -43344,6 +43607,7 @@
                   <a:srgbClr val="1B3B6F"/>
                 </a:solidFill>
                 <a:latin typeface="Amiri" pitchFamily="2" charset="-78"/>
+                <a:ea typeface="Amiri" pitchFamily="2" charset="-78"/>
                 <a:cs typeface="Amiri" pitchFamily="2" charset="-78"/>
               </a:rPr>
               <a:t>نَعَمْ، … عِنْدَ …</a:t>
@@ -43420,6 +43684,7 @@
                   <a:srgbClr val="1B3B6F"/>
                 </a:solidFill>
                 <a:latin typeface="Amiri" pitchFamily="2" charset="-78"/>
+                <a:ea typeface="Amiri" pitchFamily="2" charset="-78"/>
                 <a:cs typeface="Amiri" pitchFamily="2" charset="-78"/>
               </a:rPr>
               <a:t>هَلْ أَخْلَعُ حِذَائِي فِي بَيْتِكُمْ؟</a:t>
@@ -43694,6 +43959,7 @@
                   <a:srgbClr val="D4AF37"/>
                 </a:solidFill>
                 <a:latin typeface="Amiri" pitchFamily="2" charset="-78"/>
+                <a:ea typeface="Amiri" pitchFamily="2" charset="-78"/>
                 <a:cs typeface="Amiri" pitchFamily="2" charset="-78"/>
               </a:rPr>
               <a:t>م</a:t>
@@ -44014,6 +44280,7 @@
                   <a:srgbClr val="8A6D1E"/>
                 </a:solidFill>
                 <a:latin typeface="Amiri" pitchFamily="2" charset="-78"/>
+                <a:ea typeface="Amiri" pitchFamily="2" charset="-78"/>
                 <a:cs typeface="Amiri" pitchFamily="2" charset="-78"/>
               </a:rPr>
               <a:t>دَعْوَةٌ إِلَى عِيدِ دِيوَالِي</a:t>
@@ -44294,6 +44561,7 @@
                   <a:srgbClr val="1B3B6F"/>
                 </a:solidFill>
                 <a:latin typeface="Amiri" pitchFamily="2" charset="-78"/>
+                <a:ea typeface="Amiri" pitchFamily="2" charset="-78"/>
                 <a:cs typeface="Amiri" pitchFamily="2" charset="-78"/>
               </a:rPr>
               <a:t>شُكْرًا … ، بِكُلِّ سُرُورٍ!</a:t>
@@ -44370,6 +44638,7 @@
                   <a:srgbClr val="1B3B6F"/>
                 </a:solidFill>
                 <a:latin typeface="Amiri" pitchFamily="2" charset="-78"/>
+                <a:ea typeface="Amiri" pitchFamily="2" charset="-78"/>
                 <a:cs typeface="Amiri" pitchFamily="2" charset="-78"/>
               </a:rPr>
               <a:t>أَدْعُوكِ إِلَى احْتِفَالِ دِيوَالِي فِي بَيْتِنَا يَوْمَ السَّبْتِ!</a:t>
@@ -44538,6 +44807,7 @@
                   <a:srgbClr val="1B3B6F"/>
                 </a:solidFill>
                 <a:latin typeface="Amiri" pitchFamily="2" charset="-78"/>
+                <a:ea typeface="Amiri" pitchFamily="2" charset="-78"/>
                 <a:cs typeface="Amiri" pitchFamily="2" charset="-78"/>
               </a:rPr>
               <a:t>مَاذَا …؟</a:t>
@@ -44614,6 +44884,7 @@
                   <a:srgbClr val="1B3B6F"/>
                 </a:solidFill>
                 <a:latin typeface="Amiri" pitchFamily="2" charset="-78"/>
+                <a:ea typeface="Amiri" pitchFamily="2" charset="-78"/>
                 <a:cs typeface="Amiri" pitchFamily="2" charset="-78"/>
               </a:rPr>
               <a:t>سَيَكُونُ هُنَاكَ طَعَامٌ وَأَضْوَاءٌ كَثِيرَةٌ.</a:t>
@@ -44785,6 +45056,7 @@
                   <a:srgbClr val="1B3B6F"/>
                 </a:solidFill>
                 <a:latin typeface="Amiri" pitchFamily="2" charset="-78"/>
+                <a:ea typeface="Amiri" pitchFamily="2" charset="-78"/>
                 <a:cs typeface="Amiri" pitchFamily="2" charset="-78"/>
               </a:rPr>
               <a:t>نَعَمْ، عِيدُ … ؛ وَفِيهِ … مِثْلَكُمْ، بَيْنَمَا تُضِيئُونَ …</a:t>
@@ -44861,6 +45133,7 @@
                   <a:srgbClr val="1B3B6F"/>
                 </a:solidFill>
                 <a:latin typeface="Amiri" pitchFamily="2" charset="-78"/>
+                <a:ea typeface="Amiri" pitchFamily="2" charset="-78"/>
                 <a:cs typeface="Amiri" pitchFamily="2" charset="-78"/>
               </a:rPr>
               <a:t>حَلَوِيَّاتٍ إِنْ أَرَدْتِ. هَلْ عِنْدَكُمْ عِيدٌ مِثْلُهُ؟</a:t>
@@ -44964,6 +45237,7 @@
                   <a:srgbClr val="1B3B6F"/>
                 </a:solidFill>
                 <a:latin typeface="Amiri" pitchFamily="2" charset="-78"/>
+                <a:ea typeface="Amiri" pitchFamily="2" charset="-78"/>
                 <a:cs typeface="Amiri" pitchFamily="2" charset="-78"/>
               </a:rPr>
               <a:t>كَيْفَ أُحَيِّي …؟ وَهَلْ …؟</a:t>
@@ -45040,6 +45314,7 @@
                   <a:srgbClr val="1B3B6F"/>
                 </a:solidFill>
                 <a:latin typeface="Amiri" pitchFamily="2" charset="-78"/>
+                <a:ea typeface="Amiri" pitchFamily="2" charset="-78"/>
                 <a:cs typeface="Amiri" pitchFamily="2" charset="-78"/>
               </a:rPr>
               <a:t>رَائِعٌ! سَتَحْضُرُ جَدَّتِي أَيْضًا.</a:t>
@@ -45143,6 +45418,7 @@
                   <a:srgbClr val="1B3B6F"/>
                 </a:solidFill>
                 <a:latin typeface="Amiri" pitchFamily="2" charset="-78"/>
+                <a:ea typeface="Amiri" pitchFamily="2" charset="-78"/>
                 <a:cs typeface="Amiri" pitchFamily="2" charset="-78"/>
               </a:rPr>
               <a:t>لِأَنَّ … ؛ مَثَلًا …</a:t>
@@ -45222,6 +45498,7 @@
                   <a:srgbClr val="1B3B6F"/>
                 </a:solidFill>
                 <a:latin typeface="Amiri" pitchFamily="2" charset="-78"/>
+                <a:ea typeface="Amiri" pitchFamily="2" charset="-78"/>
                 <a:cs typeface="Amiri" pitchFamily="2" charset="-78"/>
               </a:rPr>
               <a:t>تَقُولِينَ "نَمَسْتِي" وَتَضُمِّينَ يَدَيْكِ. لِمَاذَا تُحِبِّينَ أَعْيَادَ الآخَرِينَ؟</a:t>
@@ -45396,13 +45673,9 @@
     <a:fontScheme name="Office">
       <a:majorFont>
         <a:latin typeface="Calibri Light" panose="020F0302020204030204"/>
-        <a:ea typeface=""/>
-        <a:cs typeface=""/>
-        <a:font script="Jpan" typeface="游ゴシック Light"/>
-        <a:font script="Hang" typeface="맑은 고딕"/>
-        <a:font script="Hans" typeface="等线 Light"/>
-        <a:font script="Hant" typeface="新細明體"/>
-        <a:font script="Arab" typeface="Times New Roman"/>
+        <a:ea typeface="Amiri" pitchFamily="2" charset="-78"/>
+        <a:cs typeface="Amiri" pitchFamily="2" charset="-78"/>
+        <a:font script="Arab" typeface="Amiri"/>
         <a:font script="Hebr" typeface="Times New Roman"/>
         <a:font script="Thai" typeface="Angsana New"/>
         <a:font script="Ethi" typeface="Nyala"/>
@@ -45448,13 +45721,9 @@
       </a:majorFont>
       <a:minorFont>
         <a:latin typeface="Calibri" panose="020F0502020204030204"/>
-        <a:ea typeface=""/>
-        <a:cs typeface=""/>
-        <a:font script="Jpan" typeface="游ゴシック"/>
-        <a:font script="Hang" typeface="맑은 고딕"/>
-        <a:font script="Hans" typeface="等线"/>
-        <a:font script="Hant" typeface="新細明體"/>
-        <a:font script="Arab" typeface="Arial"/>
+        <a:ea typeface="Amiri" pitchFamily="2" charset="-78"/>
+        <a:cs typeface="Amiri" pitchFamily="2" charset="-78"/>
+        <a:font script="Arab" typeface="Amiri"/>
         <a:font script="Hebr" typeface="Arial"/>
         <a:font script="Thai" typeface="Cordia New"/>
         <a:font script="Ethi" typeface="Nyala"/>
